--- a/submission_docs/generative agents_最终版.pptx
+++ b/submission_docs/generative agents_最终版.pptx
@@ -1,6 +1,6 @@
 
 <file path=ppt/presentation.xml><?xml version="1.0" encoding="utf-8"?>
-<p:presentation xmlns:a="http://schemas.openxmlformats.org/drawingml/2006/main" xmlns:p="http://schemas.openxmlformats.org/presentationml/2006/main" xmlns:r="http://schemas.openxmlformats.org/officeDocument/2006/relationships" embedTrueTypeFonts="1">
+<p:presentation xmlns:a="http://schemas.openxmlformats.org/drawingml/2006/main" xmlns:r="http://schemas.openxmlformats.org/officeDocument/2006/relationships" xmlns:p="http://schemas.openxmlformats.org/presentationml/2006/main" embedTrueTypeFonts="1">
   <p:sldMasterIdLst>
     <p:sldMasterId id="2147483648" r:id="rId1"/>
   </p:sldMasterIdLst>
@@ -4087,12 +4087,6 @@
 <file path=ppt/slides/slide10.xml><?xml version="1.0" encoding="utf-8"?>
 <p:sld xmlns:a="http://schemas.openxmlformats.org/drawingml/2006/main" xmlns:p="http://schemas.openxmlformats.org/presentationml/2006/main" xmlns:r="http://schemas.openxmlformats.org/officeDocument/2006/relationships">
   <p:cSld>
-    <p:bg>
-      <p:bgPr>
-        <a:noFill/>
-        <a:effectLst/>
-      </p:bgPr>
-    </p:bg>
     <p:spTree>
       <p:nvGrpSpPr>
         <p:cNvPr id="1" name=""/>
@@ -4100,34 +4094,264 @@
         <p:nvPr/>
       </p:nvGrpSpPr>
       <p:grpSpPr/>
+      <p:sp>
+        <p:nvSpPr>
+          <p:cNvPr id="2" name="TextBox 1"/>
+          <p:cNvSpPr txBox="1"/>
+          <p:nvPr/>
+        </p:nvSpPr>
+        <p:spPr>
+          <a:xfrm>
+            <a:off x="566928" y="201168"/>
+            <a:ext cx="6583680" cy="658368"/>
+          </a:xfrm>
+          <a:prstGeom prst="rect">
+            <a:avLst/>
+          </a:prstGeom>
+          <a:noFill/>
+          <a:effectLst/>
+        </p:spPr>
+        <p:txBody>
+          <a:bodyPr wrap="none" lIns="0" rIns="0" tIns="0" bIns="0">
+            <a:spAutoFit/>
+          </a:bodyPr>
+          <a:lstStyle/>
+          <a:p>
+            <a:r>
+              <a:rPr sz="3400" b="1">
+                <a:solidFill>
+                  <a:srgbClr val="C00000"/>
+                </a:solidFill>
+                <a:latin typeface="SimHei"/>
+              </a:rPr>
+              <a:t>LLM 演示路线</a:t>
+            </a:r>
+          </a:p>
+        </p:txBody>
+      </p:sp>
+      <p:sp>
+        <p:nvSpPr>
+          <p:cNvPr id="3" name="Rectangle 2"/>
+          <p:cNvSpPr/>
+          <p:nvPr/>
+        </p:nvSpPr>
+        <p:spPr>
+          <a:xfrm>
+            <a:off x="137160" y="987552"/>
+            <a:ext cx="11887200" cy="36576"/>
+          </a:xfrm>
+          <a:prstGeom prst="rect">
+            <a:avLst/>
+          </a:prstGeom>
+          <a:solidFill>
+            <a:srgbClr val="EB4C60"/>
+          </a:solidFill>
+          <a:ln>
+            <a:solidFill>
+              <a:srgbClr val="EB4C60"/>
+            </a:solidFill>
+          </a:ln>
+          <a:effectLst/>
+        </p:spPr>
+        <p:style>
+          <a:lnRef idx="1">
+            <a:schemeClr val="accent1"/>
+          </a:lnRef>
+          <a:fillRef idx="3">
+            <a:schemeClr val="accent1"/>
+          </a:fillRef>
+          <a:effectRef idx="2">
+            <a:schemeClr val="accent1"/>
+          </a:effectRef>
+          <a:fontRef idx="minor">
+            <a:schemeClr val="lt1"/>
+          </a:fontRef>
+        </p:style>
+        <p:txBody>
+          <a:bodyPr rtlCol="0" anchor="ctr"/>
+          <a:lstStyle/>
+          <a:p>
+            <a:pPr algn="ctr"/>
+          </a:p>
+        </p:txBody>
+      </p:sp>
+      <p:sp>
+        <p:nvSpPr>
+          <p:cNvPr id="4" name="Rectangle 3"/>
+          <p:cNvSpPr/>
+          <p:nvPr/>
+        </p:nvSpPr>
+        <p:spPr>
+          <a:xfrm>
+            <a:off x="457200" y="1426464"/>
+            <a:ext cx="146304" cy="146304"/>
+          </a:xfrm>
+          <a:prstGeom prst="rect">
+            <a:avLst/>
+          </a:prstGeom>
+          <a:solidFill>
+            <a:srgbClr val="1C4491"/>
+          </a:solidFill>
+          <a:ln>
+            <a:solidFill>
+              <a:srgbClr val="1C4491"/>
+            </a:solidFill>
+          </a:ln>
+          <a:effectLst/>
+        </p:spPr>
+        <p:style>
+          <a:lnRef idx="1">
+            <a:schemeClr val="accent1"/>
+          </a:lnRef>
+          <a:fillRef idx="3">
+            <a:schemeClr val="accent1"/>
+          </a:fillRef>
+          <a:effectRef idx="2">
+            <a:schemeClr val="accent1"/>
+          </a:effectRef>
+          <a:fontRef idx="minor">
+            <a:schemeClr val="lt1"/>
+          </a:fontRef>
+        </p:style>
+        <p:txBody>
+          <a:bodyPr rtlCol="0" anchor="ctr"/>
+          <a:lstStyle/>
+          <a:p>
+            <a:pPr algn="ctr"/>
+          </a:p>
+        </p:txBody>
+      </p:sp>
+      <p:sp>
+        <p:nvSpPr>
+          <p:cNvPr id="5" name="TextBox 4"/>
+          <p:cNvSpPr txBox="1"/>
+          <p:nvPr/>
+        </p:nvSpPr>
+        <p:spPr>
+          <a:xfrm>
+            <a:off x="749808" y="1335024"/>
+            <a:ext cx="5212080" cy="438912"/>
+          </a:xfrm>
+          <a:prstGeom prst="rect">
+            <a:avLst/>
+          </a:prstGeom>
+          <a:noFill/>
+          <a:effectLst/>
+        </p:spPr>
+        <p:txBody>
+          <a:bodyPr wrap="none" lIns="0" rIns="0" tIns="0" bIns="0">
+            <a:spAutoFit/>
+          </a:bodyPr>
+          <a:lstStyle/>
+          <a:p>
+            <a:r>
+              <a:rPr sz="2400" b="1">
+                <a:solidFill>
+                  <a:srgbClr val="C00000"/>
+                </a:solidFill>
+                <a:latin typeface="Microsoft YaHei"/>
+              </a:rPr>
+              <a:t>按时间书签讲清楚</a:t>
+            </a:r>
+          </a:p>
+        </p:txBody>
+      </p:sp>
+      <p:sp>
+        <p:nvSpPr>
+          <p:cNvPr id="6" name="Rounded Rectangle 5"/>
+          <p:cNvSpPr/>
+          <p:nvPr/>
+        </p:nvSpPr>
+        <p:spPr>
+          <a:xfrm>
+            <a:off x="685800" y="1856231"/>
+            <a:ext cx="1600200" cy="960120"/>
+          </a:xfrm>
+          <a:prstGeom prst="roundRect">
+            <a:avLst/>
+          </a:prstGeom>
+          <a:solidFill>
+            <a:srgbClr val="F8F8F8"/>
+          </a:solidFill>
+          <a:ln w="17780">
+            <a:solidFill>
+              <a:srgbClr val="C00000"/>
+            </a:solidFill>
+          </a:ln>
+          <a:effectLst/>
+        </p:spPr>
+        <p:style>
+          <a:lnRef idx="1">
+            <a:schemeClr val="accent1"/>
+          </a:lnRef>
+          <a:fillRef idx="3">
+            <a:schemeClr val="accent1"/>
+          </a:fillRef>
+          <a:effectRef idx="2">
+            <a:schemeClr val="accent1"/>
+          </a:effectRef>
+          <a:fontRef idx="minor">
+            <a:schemeClr val="lt1"/>
+          </a:fontRef>
+        </p:style>
+        <p:txBody>
+          <a:bodyPr rtlCol="0" anchor="ctr" lIns="118872" rIns="118872" tIns="109728"/>
+          <a:lstStyle/>
+          <a:p>
+            <a:pPr algn="ctr"/>
+            <a:r>
+              <a:rPr sz="1700" b="1">
+                <a:solidFill>
+                  <a:srgbClr val="202020"/>
+                </a:solidFill>
+                <a:latin typeface="Microsoft YaHei"/>
+              </a:rPr>
+              <a:t>08:00</a:t>
+            </a:r>
+          </a:p>
+          <a:p>
+            <a:pPr algn="ctr"/>
+            <a:r>
+              <a:rPr sz="1500">
+                <a:solidFill>
+                  <a:srgbClr val="202020"/>
+                </a:solidFill>
+                <a:latin typeface="Microsoft YaHei"/>
+              </a:rPr>
+              <a:t>初始态</a:t>
+            </a:r>
+          </a:p>
+        </p:txBody>
+      </p:sp>
       <p:cxnSp>
         <p:nvCxnSpPr>
-          <p:cNvPr id="19" name="直接连接符 18"/>
+          <p:cNvPr id="7" name="Connector 6"/>
           <p:cNvCxnSpPr/>
           <p:nvPr/>
         </p:nvCxnSpPr>
         <p:spPr>
           <a:xfrm>
-            <a:off x="137584" y="897467"/>
-            <a:ext cx="11616267" cy="0"/>
+            <a:off x="2286000" y="2331720"/>
+            <a:ext cx="1371600" cy="0"/>
           </a:xfrm>
           <a:prstGeom prst="line">
             <a:avLst/>
           </a:prstGeom>
-          <a:ln w="34925" cmpd="sng">
+          <a:ln w="17780">
             <a:solidFill>
-              <a:schemeClr val="accent6"/>
+              <a:srgbClr val="C00000"/>
             </a:solidFill>
           </a:ln>
+          <a:effectLst/>
         </p:spPr>
         <p:style>
-          <a:lnRef idx="1">
+          <a:lnRef idx="2">
             <a:schemeClr val="accent1"/>
           </a:lnRef>
           <a:fillRef idx="0">
             <a:schemeClr val="accent1"/>
           </a:fillRef>
-          <a:effectRef idx="0">
+          <a:effectRef idx="1">
             <a:schemeClr val="accent1"/>
           </a:effectRef>
           <a:fontRef idx="minor">
@@ -4137,155 +4361,86 @@
       </p:cxnSp>
       <p:sp>
         <p:nvSpPr>
-          <p:cNvPr id="3076" name="AutoShape 2" descr="http://img1.gtimg.com/rushidao/pics/hv1/229/47/1914/124470064.jpg"/>
-          <p:cNvSpPr>
-            <a:spLocks noChangeAspect="1"/>
-          </p:cNvSpPr>
-          <p:nvPr/>
-        </p:nvSpPr>
-        <p:spPr>
-          <a:xfrm>
-            <a:off x="207433" y="-192616"/>
-            <a:ext cx="406400" cy="406400"/>
-          </a:xfrm>
-          <a:prstGeom prst="rect">
-            <a:avLst/>
-          </a:prstGeom>
-          <a:noFill/>
-          <a:ln w="9525">
-            <a:noFill/>
+          <p:cNvPr id="8" name="Rounded Rectangle 7"/>
+          <p:cNvSpPr/>
+          <p:nvPr/>
+        </p:nvSpPr>
+        <p:spPr>
+          <a:xfrm>
+            <a:off x="3657600" y="1856231"/>
+            <a:ext cx="1920240" cy="960120"/>
+          </a:xfrm>
+          <a:prstGeom prst="roundRect">
+            <a:avLst/>
+          </a:prstGeom>
+          <a:solidFill>
+            <a:srgbClr val="F8F8F8"/>
+          </a:solidFill>
+          <a:ln w="17780">
+            <a:solidFill>
+              <a:srgbClr val="C00000"/>
+            </a:solidFill>
           </a:ln>
-        </p:spPr>
-        <p:txBody>
-          <a:bodyPr/>
-          <a:p>
-            <a:pPr eaLnBrk="1" hangingPunct="1"/>
-            <a:endParaRPr lang="zh-CN" altLang="en-US" sz="2400" dirty="0">
-              <a:latin typeface="Arial" panose="020B0604020202090204" pitchFamily="34" charset="0"/>
-            </a:endParaRPr>
-          </a:p>
-        </p:txBody>
-      </p:sp>
-      <p:sp>
-        <p:nvSpPr>
-          <p:cNvPr id="2" name="文本框 1"/>
-          <p:cNvSpPr txBox="1"/>
-          <p:nvPr/>
-        </p:nvSpPr>
-        <p:spPr>
-          <a:xfrm>
-            <a:off x="343535" y="1112520"/>
-            <a:ext cx="5334635" cy="521970"/>
-          </a:xfrm>
-          <a:prstGeom prst="rect">
-            <a:avLst/>
-          </a:prstGeom>
-          <a:noFill/>
-        </p:spPr>
-        <p:txBody>
-          <a:bodyPr wrap="square" rtlCol="0" anchor="t">
-            <a:spAutoFit/>
-          </a:bodyPr>
-          <a:lstStyle/>
-          <a:p>
-            <a:r>
-              <a:t>LLM 模式演示路线</a:t>
-            </a:r>
-          </a:p>
-        </p:txBody>
-      </p:sp>
-      <p:sp>
-        <p:nvSpPr>
-          <p:cNvPr id="5" name="标题 1"/>
-          <p:cNvSpPr txBox="1"/>
-          <p:nvPr>
-            <p:custDataLst>
-              <p:tags r:id="rId1"/>
-            </p:custDataLst>
-          </p:nvPr>
-        </p:nvSpPr>
-        <p:spPr>
-          <a:xfrm>
-            <a:off x="463137" y="174094"/>
-            <a:ext cx="11409315" cy="736490"/>
-          </a:xfrm>
-          <a:prstGeom prst="rect">
-            <a:avLst/>
-          </a:prstGeom>
-        </p:spPr>
-        <p:txBody>
-          <a:bodyPr>
-            <a:noAutofit/>
-          </a:bodyPr>
-          <a:lstStyle>
-            <a:lvl1pPr algn="l" defTabSz="914400" rtl="0" eaLnBrk="1" latinLnBrk="0" hangingPunct="1">
-              <a:lnSpc>
-                <a:spcPct val="90000"/>
-              </a:lnSpc>
-              <a:spcBef>
-                <a:spcPct val="0"/>
-              </a:spcBef>
-              <a:buNone/>
-              <a:defRPr sz="4400" kern="1200">
-                <a:solidFill>
-                  <a:schemeClr val="tx1"/>
-                </a:solidFill>
-                <a:latin typeface="+mj-lt"/>
-                <a:ea typeface="+mj-ea"/>
-                <a:cs typeface="+mj-cs"/>
-              </a:defRPr>
-            </a:lvl1pPr>
-          </a:lstStyle>
-          <a:p>
-            <a:r>
-              <a:t>论文复现补充</a:t>
-            </a:r>
-          </a:p>
-        </p:txBody>
-      </p:sp>
-      <p:sp>
-        <p:nvSpPr>
-          <p:cNvPr id="3" name="文本框 2"/>
-          <p:cNvSpPr txBox="1"/>
-          <p:nvPr/>
-        </p:nvSpPr>
-        <p:spPr>
-          <a:xfrm>
-            <a:off x="462915" y="2960370"/>
-            <a:ext cx="5334635" cy="521970"/>
-          </a:xfrm>
-          <a:prstGeom prst="rect">
-            <a:avLst/>
-          </a:prstGeom>
-          <a:noFill/>
-        </p:spPr>
-        <p:txBody>
-          <a:bodyPr wrap="square" rtlCol="0" anchor="t">
-            <a:spAutoFit/>
-          </a:bodyPr>
-          <a:lstStyle/>
-          <a:p>
-            <a:r>
-              <a:t>时间线</a:t>
+          <a:effectLst/>
+        </p:spPr>
+        <p:style>
+          <a:lnRef idx="1">
+            <a:schemeClr val="accent1"/>
+          </a:lnRef>
+          <a:fillRef idx="3">
+            <a:schemeClr val="accent1"/>
+          </a:fillRef>
+          <a:effectRef idx="2">
+            <a:schemeClr val="accent1"/>
+          </a:effectRef>
+          <a:fontRef idx="minor">
+            <a:schemeClr val="lt1"/>
+          </a:fontRef>
+        </p:style>
+        <p:txBody>
+          <a:bodyPr rtlCol="0" anchor="ctr" lIns="118872" rIns="118872" tIns="109728"/>
+          <a:lstStyle/>
+          <a:p>
+            <a:pPr algn="ctr"/>
+            <a:r>
+              <a:rPr sz="1700" b="1">
+                <a:solidFill>
+                  <a:srgbClr val="202020"/>
+                </a:solidFill>
+                <a:latin typeface="Microsoft YaHei"/>
+              </a:rPr>
+              <a:t>10:00</a:t>
+            </a:r>
+          </a:p>
+          <a:p>
+            <a:pPr algn="ctr"/>
+            <a:r>
+              <a:rPr sz="1500">
+                <a:solidFill>
+                  <a:srgbClr val="202020"/>
+                </a:solidFill>
+                <a:latin typeface="Microsoft YaHei"/>
+              </a:rPr>
+              <a:t>Alice -&gt; Bob</a:t>
             </a:r>
           </a:p>
         </p:txBody>
       </p:sp>
       <p:cxnSp>
         <p:nvCxnSpPr>
-          <p:cNvPr id="14" name="Connector 4"/>
+          <p:cNvPr id="9" name="Connector 8"/>
           <p:cNvCxnSpPr/>
           <p:nvPr/>
         </p:nvCxnSpPr>
         <p:spPr>
           <a:xfrm>
-            <a:off x="1965960" y="2148840"/>
-            <a:ext cx="1874520" cy="0"/>
+            <a:off x="5577840" y="2331720"/>
+            <a:ext cx="1600200" cy="0"/>
           </a:xfrm>
           <a:prstGeom prst="line">
             <a:avLst/>
           </a:prstGeom>
-          <a:ln w="21590">
+          <a:ln w="17780">
             <a:solidFill>
               <a:srgbClr val="C00000"/>
             </a:solidFill>
@@ -4307,21 +4462,88 @@
           </a:fontRef>
         </p:style>
       </p:cxnSp>
+      <p:sp>
+        <p:nvSpPr>
+          <p:cNvPr id="10" name="Rounded Rectangle 9"/>
+          <p:cNvSpPr/>
+          <p:nvPr/>
+        </p:nvSpPr>
+        <p:spPr>
+          <a:xfrm>
+            <a:off x="7178040" y="1856231"/>
+            <a:ext cx="1965960" cy="960120"/>
+          </a:xfrm>
+          <a:prstGeom prst="roundRect">
+            <a:avLst/>
+          </a:prstGeom>
+          <a:solidFill>
+            <a:srgbClr val="F8F8F8"/>
+          </a:solidFill>
+          <a:ln w="17780">
+            <a:solidFill>
+              <a:srgbClr val="C00000"/>
+            </a:solidFill>
+          </a:ln>
+          <a:effectLst/>
+        </p:spPr>
+        <p:style>
+          <a:lnRef idx="1">
+            <a:schemeClr val="accent1"/>
+          </a:lnRef>
+          <a:fillRef idx="3">
+            <a:schemeClr val="accent1"/>
+          </a:fillRef>
+          <a:effectRef idx="2">
+            <a:schemeClr val="accent1"/>
+          </a:effectRef>
+          <a:fontRef idx="minor">
+            <a:schemeClr val="lt1"/>
+          </a:fontRef>
+        </p:style>
+        <p:txBody>
+          <a:bodyPr rtlCol="0" anchor="ctr" lIns="118872" rIns="118872" tIns="109728"/>
+          <a:lstStyle/>
+          <a:p>
+            <a:pPr algn="ctr"/>
+            <a:r>
+              <a:rPr sz="1700" b="1">
+                <a:solidFill>
+                  <a:srgbClr val="202020"/>
+                </a:solidFill>
+                <a:latin typeface="Microsoft YaHei"/>
+              </a:rPr>
+              <a:t>14:00</a:t>
+            </a:r>
+          </a:p>
+          <a:p>
+            <a:pPr algn="ctr"/>
+            <a:r>
+              <a:rPr sz="1500">
+                <a:solidFill>
+                  <a:srgbClr val="202020"/>
+                </a:solidFill>
+                <a:latin typeface="Microsoft YaHei"/>
+              </a:rPr>
+              <a:t>Bob -&gt; Carol</a:t>
+            </a:r>
+          </a:p>
+        </p:txBody>
+      </p:sp>
       <p:cxnSp>
         <p:nvCxnSpPr>
-          <p:cNvPr id="15" name="Connector 5"/>
+          <p:cNvPr id="11" name="Connector 10"/>
           <p:cNvCxnSpPr/>
           <p:nvPr/>
         </p:nvCxnSpPr>
         <p:spPr>
           <a:xfrm>
-            <a:off x="5532120" y="2148840"/>
-            <a:ext cx="1874520" cy="0"/>
+            <a:off x="9144000" y="2331720"/>
+            <a:ext cx="914400" cy="0"/>
           </a:xfrm>
           <a:prstGeom prst="line">
             <a:avLst/>
           </a:prstGeom>
-          <a:ln w="21590">
+          <a:ln w="17780">
             <a:solidFill>
               <a:srgbClr val="C00000"/>
             </a:solidFill>
@@ -4343,21 +4565,24 @@
           </a:fontRef>
         </p:style>
       </p:cxnSp>
-      <p:cxnSp>
-        <p:nvCxnSpPr>
-          <p:cNvPr id="16" name="Connector 6"/>
-          <p:cNvCxnSpPr/>
-          <p:nvPr/>
-        </p:nvCxnSpPr>
-        <p:spPr>
-          <a:xfrm>
-            <a:off x="9098280" y="2148840"/>
-            <a:ext cx="1234440" cy="0"/>
-          </a:xfrm>
-          <a:prstGeom prst="line">
-            <a:avLst/>
-          </a:prstGeom>
-          <a:ln w="21590">
+      <p:sp>
+        <p:nvSpPr>
+          <p:cNvPr id="12" name="Rounded Rectangle 11"/>
+          <p:cNvSpPr/>
+          <p:nvPr/>
+        </p:nvSpPr>
+        <p:spPr>
+          <a:xfrm>
+            <a:off x="10058400" y="1856231"/>
+            <a:ext cx="1664208" cy="960120"/>
+          </a:xfrm>
+          <a:prstGeom prst="roundRect">
+            <a:avLst/>
+          </a:prstGeom>
+          <a:solidFill>
+            <a:srgbClr val="F8F8F8"/>
+          </a:solidFill>
+          <a:ln w="17780">
             <a:solidFill>
               <a:srgbClr val="C00000"/>
             </a:solidFill>
@@ -4365,45 +4590,6 @@
           <a:effectLst/>
         </p:spPr>
         <p:style>
-          <a:lnRef idx="2">
-            <a:schemeClr val="accent1"/>
-          </a:lnRef>
-          <a:fillRef idx="0">
-            <a:schemeClr val="accent1"/>
-          </a:fillRef>
-          <a:effectRef idx="1">
-            <a:schemeClr val="accent1"/>
-          </a:effectRef>
-          <a:fontRef idx="minor">
-            <a:schemeClr val="tx1"/>
-          </a:fontRef>
-        </p:style>
-      </p:cxnSp>
-      <p:sp>
-        <p:nvSpPr>
-          <p:cNvPr id="17" name="Rounded Rectangle 7"/>
-          <p:cNvSpPr/>
-          <p:nvPr/>
-        </p:nvSpPr>
-        <p:spPr>
-          <a:xfrm>
-            <a:off x="685800" y="1664208"/>
-            <a:ext cx="1554480" cy="969264"/>
-          </a:xfrm>
-          <a:prstGeom prst="roundRect">
-            <a:avLst/>
-          </a:prstGeom>
-          <a:solidFill>
-            <a:srgbClr val="F5F5F5"/>
-          </a:solidFill>
-          <a:ln w="15240">
-            <a:solidFill>
-              <a:srgbClr val="C00000"/>
-            </a:solidFill>
-          </a:ln>
-          <a:effectLst/>
-        </p:spPr>
-        <p:style>
           <a:lnRef idx="1">
             <a:schemeClr val="accent1"/>
           </a:lnRef>
@@ -4418,40 +4604,54 @@
           </a:fontRef>
         </p:style>
         <p:txBody>
-          <a:bodyPr wrap="square" lIns="73152" rIns="73152" rtlCol="0" anchor="ctr"/>
-          <a:lstStyle/>
-          <a:p>
-            <a:r>
-              <a:t>08:00</a:t>
-            </a:r>
-          </a:p>
-          <a:p>
-            <a:r>
-              <a:t>初始态</a:t>
-            </a:r>
-          </a:p>
-        </p:txBody>
-      </p:sp>
-      <p:sp>
-        <p:nvSpPr>
-          <p:cNvPr id="18" name="Rounded Rectangle 8"/>
+          <a:bodyPr rtlCol="0" anchor="ctr" lIns="118872" rIns="118872" tIns="109728"/>
+          <a:lstStyle/>
+          <a:p>
+            <a:pPr algn="ctr"/>
+            <a:r>
+              <a:rPr sz="1700" b="1">
+                <a:solidFill>
+                  <a:srgbClr val="202020"/>
+                </a:solidFill>
+                <a:latin typeface="Microsoft YaHei"/>
+              </a:rPr>
+              <a:t>14:30</a:t>
+            </a:r>
+          </a:p>
+          <a:p>
+            <a:pPr algn="ctr"/>
+            <a:r>
+              <a:rPr sz="1500">
+                <a:solidFill>
+                  <a:srgbClr val="202020"/>
+                </a:solidFill>
+                <a:latin typeface="Microsoft YaHei"/>
+              </a:rPr>
+              <a:t>反思生成</a:t>
+            </a:r>
+          </a:p>
+        </p:txBody>
+      </p:sp>
+      <p:sp>
+        <p:nvSpPr>
+          <p:cNvPr id="13" name="Rectangle 12"/>
           <p:cNvSpPr/>
           <p:nvPr/>
         </p:nvSpPr>
         <p:spPr>
           <a:xfrm>
-            <a:off x="3657600" y="1664208"/>
-            <a:ext cx="1920240" cy="969264"/>
-          </a:xfrm>
-          <a:prstGeom prst="roundRect">
+            <a:off x="457200" y="3383280"/>
+            <a:ext cx="146304" cy="146304"/>
+          </a:xfrm>
+          <a:prstGeom prst="rect">
             <a:avLst/>
           </a:prstGeom>
           <a:solidFill>
-            <a:srgbClr val="F5F5F5"/>
+            <a:srgbClr val="1C4491"/>
           </a:solidFill>
-          <a:ln w="15240">
+          <a:ln>
             <a:solidFill>
-              <a:srgbClr val="C00000"/>
+              <a:srgbClr val="1C4491"/>
             </a:solidFill>
           </a:ln>
           <a:effectLst/>
@@ -4471,40 +4671,173 @@
           </a:fontRef>
         </p:style>
         <p:txBody>
-          <a:bodyPr wrap="square" lIns="73152" rIns="73152" rtlCol="0" anchor="ctr"/>
-          <a:lstStyle/>
-          <a:p>
-            <a:r>
-              <a:t>10:00</a:t>
-            </a:r>
-          </a:p>
-          <a:p>
-            <a:r>
-              <a:t>Alice -&gt; Bob</a:t>
-            </a:r>
-          </a:p>
-        </p:txBody>
-      </p:sp>
-      <p:sp>
-        <p:nvSpPr>
-          <p:cNvPr id="20" name="Rounded Rectangle 9"/>
+          <a:bodyPr rtlCol="0" anchor="ctr"/>
+          <a:lstStyle/>
+          <a:p>
+            <a:pPr algn="ctr"/>
+          </a:p>
+        </p:txBody>
+      </p:sp>
+      <p:sp>
+        <p:nvSpPr>
+          <p:cNvPr id="14" name="TextBox 13"/>
+          <p:cNvSpPr txBox="1"/>
+          <p:nvPr/>
+        </p:nvSpPr>
+        <p:spPr>
+          <a:xfrm>
+            <a:off x="749808" y="3291840"/>
+            <a:ext cx="5212080" cy="438912"/>
+          </a:xfrm>
+          <a:prstGeom prst="rect">
+            <a:avLst/>
+          </a:prstGeom>
+          <a:noFill/>
+          <a:effectLst/>
+        </p:spPr>
+        <p:txBody>
+          <a:bodyPr wrap="none" lIns="0" rIns="0" tIns="0" bIns="0">
+            <a:spAutoFit/>
+          </a:bodyPr>
+          <a:lstStyle/>
+          <a:p>
+            <a:r>
+              <a:rPr sz="2400" b="1">
+                <a:solidFill>
+                  <a:srgbClr val="C00000"/>
+                </a:solidFill>
+                <a:latin typeface="Microsoft YaHei"/>
+              </a:rPr>
+              <a:t>说明</a:t>
+            </a:r>
+          </a:p>
+        </p:txBody>
+      </p:sp>
+      <p:sp>
+        <p:nvSpPr>
+          <p:cNvPr id="15" name="TextBox 14"/>
+          <p:cNvSpPr txBox="1"/>
+          <p:nvPr/>
+        </p:nvSpPr>
+        <p:spPr>
+          <a:xfrm>
+            <a:off x="749808" y="3822191"/>
+            <a:ext cx="5394960" cy="274320"/>
+          </a:xfrm>
+          <a:prstGeom prst="rect">
+            <a:avLst/>
+          </a:prstGeom>
+          <a:noFill/>
+          <a:effectLst/>
+        </p:spPr>
+        <p:txBody>
+          <a:bodyPr wrap="none" lIns="0" rIns="0" tIns="0" bIns="0">
+            <a:spAutoFit/>
+          </a:bodyPr>
+          <a:lstStyle/>
+          <a:p>
+            <a:r>
+              <a:rPr sz="1500" b="0">
+                <a:solidFill>
+                  <a:srgbClr val="202020"/>
+                </a:solidFill>
+                <a:latin typeface="Microsoft YaHei"/>
+              </a:rPr>
+              <a:t>08:00：展示 persona、初始记忆和计划。</a:t>
+            </a:r>
+          </a:p>
+        </p:txBody>
+      </p:sp>
+      <p:sp>
+        <p:nvSpPr>
+          <p:cNvPr id="16" name="TextBox 15"/>
+          <p:cNvSpPr txBox="1"/>
+          <p:nvPr/>
+        </p:nvSpPr>
+        <p:spPr>
+          <a:xfrm>
+            <a:off x="749808" y="4142231"/>
+            <a:ext cx="5394960" cy="274320"/>
+          </a:xfrm>
+          <a:prstGeom prst="rect">
+            <a:avLst/>
+          </a:prstGeom>
+          <a:noFill/>
+          <a:effectLst/>
+        </p:spPr>
+        <p:txBody>
+          <a:bodyPr wrap="none" lIns="0" rIns="0" tIns="0" bIns="0">
+            <a:spAutoFit/>
+          </a:bodyPr>
+          <a:lstStyle/>
+          <a:p>
+            <a:r>
+              <a:rPr sz="1500" b="0">
+                <a:solidFill>
+                  <a:srgbClr val="202020"/>
+                </a:solidFill>
+                <a:latin typeface="Microsoft YaHei"/>
+              </a:rPr>
+              <a:t>10:00：展示对话如何改写 Bob 的内部状态。</a:t>
+            </a:r>
+          </a:p>
+        </p:txBody>
+      </p:sp>
+      <p:sp>
+        <p:nvSpPr>
+          <p:cNvPr id="17" name="TextBox 16"/>
+          <p:cNvSpPr txBox="1"/>
+          <p:nvPr/>
+        </p:nvSpPr>
+        <p:spPr>
+          <a:xfrm>
+            <a:off x="749808" y="4462272"/>
+            <a:ext cx="5394960" cy="274320"/>
+          </a:xfrm>
+          <a:prstGeom prst="rect">
+            <a:avLst/>
+          </a:prstGeom>
+          <a:noFill/>
+          <a:effectLst/>
+        </p:spPr>
+        <p:txBody>
+          <a:bodyPr wrap="none" lIns="0" rIns="0" tIns="0" bIns="0">
+            <a:spAutoFit/>
+          </a:bodyPr>
+          <a:lstStyle/>
+          <a:p>
+            <a:r>
+              <a:rPr sz="1500" b="0">
+                <a:solidFill>
+                  <a:srgbClr val="202020"/>
+                </a:solidFill>
+                <a:latin typeface="Microsoft YaHei"/>
+              </a:rPr>
+              <a:t>14:00：展示局部互动如何形成传播链。</a:t>
+            </a:r>
+          </a:p>
+        </p:txBody>
+      </p:sp>
+      <p:sp>
+        <p:nvSpPr>
+          <p:cNvPr id="18" name="Rounded Rectangle 17"/>
           <p:cNvSpPr/>
           <p:nvPr/>
         </p:nvSpPr>
         <p:spPr>
           <a:xfrm>
-            <a:off x="7205472" y="1664208"/>
-            <a:ext cx="1965960" cy="969264"/>
+            <a:off x="6720840" y="3822191"/>
+            <a:ext cx="4892040" cy="1572768"/>
           </a:xfrm>
           <a:prstGeom prst="roundRect">
             <a:avLst/>
           </a:prstGeom>
           <a:solidFill>
-            <a:srgbClr val="F5F5F5"/>
+            <a:srgbClr val="202020"/>
           </a:solidFill>
-          <a:ln w="15240">
+          <a:ln>
             <a:solidFill>
-              <a:srgbClr val="C00000"/>
+              <a:srgbClr val="202020"/>
             </a:solidFill>
           </a:ln>
           <a:effectLst/>
@@ -4524,117 +4857,62 @@
           </a:fontRef>
         </p:style>
         <p:txBody>
-          <a:bodyPr wrap="square" lIns="73152" rIns="73152" rtlCol="0" anchor="ctr"/>
-          <a:lstStyle/>
-          <a:p>
-            <a:r>
-              <a:t>14:00</a:t>
-            </a:r>
-          </a:p>
-          <a:p>
-            <a:r>
-              <a:t>Bob -&gt; Carol</a:t>
-            </a:r>
-          </a:p>
-        </p:txBody>
-      </p:sp>
-      <p:sp>
-        <p:nvSpPr>
-          <p:cNvPr id="21" name="Rounded Rectangle 10"/>
-          <p:cNvSpPr/>
-          <p:nvPr/>
-        </p:nvSpPr>
-        <p:spPr>
-          <a:xfrm>
-            <a:off x="10131552" y="1664208"/>
-            <a:ext cx="1600200" cy="969264"/>
-          </a:xfrm>
-          <a:prstGeom prst="roundRect">
-            <a:avLst/>
-          </a:prstGeom>
-          <a:solidFill>
-            <a:srgbClr val="F5F5F5"/>
-          </a:solidFill>
-          <a:ln w="15240">
-            <a:solidFill>
-              <a:srgbClr val="C00000"/>
-            </a:solidFill>
-          </a:ln>
-          <a:effectLst/>
-        </p:spPr>
-        <p:style>
-          <a:lnRef idx="1">
-            <a:schemeClr val="accent1"/>
-          </a:lnRef>
-          <a:fillRef idx="3">
-            <a:schemeClr val="accent1"/>
-          </a:fillRef>
-          <a:effectRef idx="2">
-            <a:schemeClr val="accent1"/>
-          </a:effectRef>
-          <a:fontRef idx="minor">
-            <a:schemeClr val="lt1"/>
-          </a:fontRef>
-        </p:style>
-        <p:txBody>
-          <a:bodyPr wrap="square" lIns="73152" rIns="73152" rtlCol="0" anchor="ctr"/>
-          <a:lstStyle/>
-          <a:p>
-            <a:r>
-              <a:t>14:30</a:t>
-            </a:r>
-          </a:p>
-          <a:p>
-            <a:r>
-              <a:t>Reflection</a:t>
-            </a:r>
-          </a:p>
-        </p:txBody>
-      </p:sp>
-      <p:sp>
-        <p:nvSpPr>
-          <p:cNvPr id="22" name="Rounded Rectangle 13"/>
-          <p:cNvSpPr/>
-          <p:nvPr/>
-        </p:nvSpPr>
-        <p:spPr>
-          <a:xfrm>
-            <a:off x="7062470" y="3753612"/>
-            <a:ext cx="4343400" cy="1600200"/>
-          </a:xfrm>
-          <a:prstGeom prst="roundRect">
-            <a:avLst/>
-          </a:prstGeom>
-          <a:solidFill>
-            <a:srgbClr val="232323"/>
-          </a:solidFill>
-          <a:ln>
-            <a:solidFill>
-              <a:srgbClr val="232323"/>
-            </a:solidFill>
-          </a:ln>
-          <a:effectLst/>
-        </p:spPr>
-        <p:style>
-          <a:lnRef idx="1">
-            <a:schemeClr val="accent1"/>
-          </a:lnRef>
-          <a:fillRef idx="3">
-            <a:schemeClr val="accent1"/>
-          </a:fillRef>
-          <a:effectRef idx="2">
-            <a:schemeClr val="accent1"/>
-          </a:effectRef>
-          <a:fontRef idx="minor">
-            <a:schemeClr val="lt1"/>
-          </a:fontRef>
-        </p:style>
-        <p:txBody>
-          <a:bodyPr wrap="none" lIns="109728" tIns="91440" rIns="73152" bIns="73152" rtlCol="0" anchor="ctr"/>
-          <a:lstStyle/>
-          <a:p>
-            <a:r>
-              <a:t>08:00 展示 persona、初始记忆和计划；10:00 展示对话如何改写 Bob 内部状态；14:00 展示局部互动形成传播链；14:30 展示记忆重要性超过阈值后的高层反思。</a:t>
+          <a:bodyPr rtlCol="0" anchor="ctr" lIns="201168" rIns="201168" tIns="146304"/>
+          <a:lstStyle/>
+          <a:p>
+            <a:pPr algn="ctr"/>
+            <a:r>
+              <a:rPr sz="1500" b="1">
+                <a:solidFill>
+                  <a:srgbClr val="FFFFFF"/>
+                </a:solidFill>
+                <a:latin typeface="Microsoft YaHei"/>
+              </a:rPr>
+              <a:t>讲解顺序</a:t>
+            </a:r>
+          </a:p>
+          <a:p>
+            <a:r>
+              <a:rPr sz="1200">
+                <a:solidFill>
+                  <a:srgbClr val="FFFFFF"/>
+                </a:solidFill>
+                <a:latin typeface="Microsoft YaHei"/>
+              </a:rPr>
+              <a:t>08:00：展示 persona、初始记忆和计划。</a:t>
+            </a:r>
+          </a:p>
+          <a:p>
+            <a:r>
+              <a:rPr sz="1200">
+                <a:solidFill>
+                  <a:srgbClr val="FFFFFF"/>
+                </a:solidFill>
+                <a:latin typeface="Microsoft YaHei"/>
+              </a:rPr>
+              <a:t>10:00：展示对话如何改写 Bob 的内部状态。</a:t>
+            </a:r>
+          </a:p>
+          <a:p>
+            <a:r>
+              <a:rPr sz="1200">
+                <a:solidFill>
+                  <a:srgbClr val="FFFFFF"/>
+                </a:solidFill>
+                <a:latin typeface="Microsoft YaHei"/>
+              </a:rPr>
+              <a:t>14:00：展示局部互动如何形成传播链。</a:t>
+            </a:r>
+          </a:p>
+          <a:p>
+            <a:r>
+              <a:rPr sz="1200">
+                <a:solidFill>
+                  <a:srgbClr val="FFFFFF"/>
+                </a:solidFill>
+                <a:latin typeface="Microsoft YaHei"/>
+              </a:rPr>
+              <a:t>14:30：展示记忆重要性超过阈值后的高层反思。</a:t>
             </a:r>
           </a:p>
         </p:txBody>
@@ -4650,12 +4928,6 @@
 <file path=ppt/slides/slide11.xml><?xml version="1.0" encoding="utf-8"?>
 <p:sld xmlns:a="http://schemas.openxmlformats.org/drawingml/2006/main" xmlns:p="http://schemas.openxmlformats.org/presentationml/2006/main" xmlns:r="http://schemas.openxmlformats.org/officeDocument/2006/relationships">
   <p:cSld>
-    <p:bg>
-      <p:bgPr>
-        <a:noFill/>
-        <a:effectLst/>
-      </p:bgPr>
-    </p:bg>
     <p:spTree>
       <p:nvGrpSpPr>
         <p:cNvPr id="1" name=""/>
@@ -4663,34 +4935,264 @@
         <p:nvPr/>
       </p:nvGrpSpPr>
       <p:grpSpPr/>
+      <p:sp>
+        <p:nvSpPr>
+          <p:cNvPr id="2" name="TextBox 1"/>
+          <p:cNvSpPr txBox="1"/>
+          <p:nvPr/>
+        </p:nvSpPr>
+        <p:spPr>
+          <a:xfrm>
+            <a:off x="566928" y="201168"/>
+            <a:ext cx="6583680" cy="658368"/>
+          </a:xfrm>
+          <a:prstGeom prst="rect">
+            <a:avLst/>
+          </a:prstGeom>
+          <a:noFill/>
+          <a:effectLst/>
+        </p:spPr>
+        <p:txBody>
+          <a:bodyPr wrap="none" lIns="0" rIns="0" tIns="0" bIns="0">
+            <a:spAutoFit/>
+          </a:bodyPr>
+          <a:lstStyle/>
+          <a:p>
+            <a:r>
+              <a:rPr sz="3400" b="1">
+                <a:solidFill>
+                  <a:srgbClr val="C00000"/>
+                </a:solidFill>
+                <a:latin typeface="SimHei"/>
+              </a:rPr>
+              <a:t>机制对应关系</a:t>
+            </a:r>
+          </a:p>
+        </p:txBody>
+      </p:sp>
+      <p:sp>
+        <p:nvSpPr>
+          <p:cNvPr id="3" name="Rectangle 2"/>
+          <p:cNvSpPr/>
+          <p:nvPr/>
+        </p:nvSpPr>
+        <p:spPr>
+          <a:xfrm>
+            <a:off x="137160" y="987552"/>
+            <a:ext cx="11887200" cy="36576"/>
+          </a:xfrm>
+          <a:prstGeom prst="rect">
+            <a:avLst/>
+          </a:prstGeom>
+          <a:solidFill>
+            <a:srgbClr val="EB4C60"/>
+          </a:solidFill>
+          <a:ln>
+            <a:solidFill>
+              <a:srgbClr val="EB4C60"/>
+            </a:solidFill>
+          </a:ln>
+          <a:effectLst/>
+        </p:spPr>
+        <p:style>
+          <a:lnRef idx="1">
+            <a:schemeClr val="accent1"/>
+          </a:lnRef>
+          <a:fillRef idx="3">
+            <a:schemeClr val="accent1"/>
+          </a:fillRef>
+          <a:effectRef idx="2">
+            <a:schemeClr val="accent1"/>
+          </a:effectRef>
+          <a:fontRef idx="minor">
+            <a:schemeClr val="lt1"/>
+          </a:fontRef>
+        </p:style>
+        <p:txBody>
+          <a:bodyPr rtlCol="0" anchor="ctr"/>
+          <a:lstStyle/>
+          <a:p>
+            <a:pPr algn="ctr"/>
+          </a:p>
+        </p:txBody>
+      </p:sp>
+      <p:sp>
+        <p:nvSpPr>
+          <p:cNvPr id="4" name="Rectangle 3"/>
+          <p:cNvSpPr/>
+          <p:nvPr/>
+        </p:nvSpPr>
+        <p:spPr>
+          <a:xfrm>
+            <a:off x="457200" y="1426464"/>
+            <a:ext cx="146304" cy="146304"/>
+          </a:xfrm>
+          <a:prstGeom prst="rect">
+            <a:avLst/>
+          </a:prstGeom>
+          <a:solidFill>
+            <a:srgbClr val="1C4491"/>
+          </a:solidFill>
+          <a:ln>
+            <a:solidFill>
+              <a:srgbClr val="1C4491"/>
+            </a:solidFill>
+          </a:ln>
+          <a:effectLst/>
+        </p:spPr>
+        <p:style>
+          <a:lnRef idx="1">
+            <a:schemeClr val="accent1"/>
+          </a:lnRef>
+          <a:fillRef idx="3">
+            <a:schemeClr val="accent1"/>
+          </a:fillRef>
+          <a:effectRef idx="2">
+            <a:schemeClr val="accent1"/>
+          </a:effectRef>
+          <a:fontRef idx="minor">
+            <a:schemeClr val="lt1"/>
+          </a:fontRef>
+        </p:style>
+        <p:txBody>
+          <a:bodyPr rtlCol="0" anchor="ctr"/>
+          <a:lstStyle/>
+          <a:p>
+            <a:pPr algn="ctr"/>
+          </a:p>
+        </p:txBody>
+      </p:sp>
+      <p:sp>
+        <p:nvSpPr>
+          <p:cNvPr id="5" name="TextBox 4"/>
+          <p:cNvSpPr txBox="1"/>
+          <p:nvPr/>
+        </p:nvSpPr>
+        <p:spPr>
+          <a:xfrm>
+            <a:off x="749808" y="1335024"/>
+            <a:ext cx="5212080" cy="438912"/>
+          </a:xfrm>
+          <a:prstGeom prst="rect">
+            <a:avLst/>
+          </a:prstGeom>
+          <a:noFill/>
+          <a:effectLst/>
+        </p:spPr>
+        <p:txBody>
+          <a:bodyPr wrap="none" lIns="0" rIns="0" tIns="0" bIns="0">
+            <a:spAutoFit/>
+          </a:bodyPr>
+          <a:lstStyle/>
+          <a:p>
+            <a:r>
+              <a:rPr sz="2400" b="1">
+                <a:solidFill>
+                  <a:srgbClr val="C00000"/>
+                </a:solidFill>
+                <a:latin typeface="Microsoft YaHei"/>
+              </a:rPr>
+              <a:t>代码现象对应论文模块</a:t>
+            </a:r>
+          </a:p>
+        </p:txBody>
+      </p:sp>
+      <p:sp>
+        <p:nvSpPr>
+          <p:cNvPr id="6" name="Rounded Rectangle 5"/>
+          <p:cNvSpPr/>
+          <p:nvPr/>
+        </p:nvSpPr>
+        <p:spPr>
+          <a:xfrm>
+            <a:off x="685800" y="1856231"/>
+            <a:ext cx="1600200" cy="960120"/>
+          </a:xfrm>
+          <a:prstGeom prst="roundRect">
+            <a:avLst/>
+          </a:prstGeom>
+          <a:solidFill>
+            <a:srgbClr val="F8F8F8"/>
+          </a:solidFill>
+          <a:ln w="17780">
+            <a:solidFill>
+              <a:srgbClr val="C00000"/>
+            </a:solidFill>
+          </a:ln>
+          <a:effectLst/>
+        </p:spPr>
+        <p:style>
+          <a:lnRef idx="1">
+            <a:schemeClr val="accent1"/>
+          </a:lnRef>
+          <a:fillRef idx="3">
+            <a:schemeClr val="accent1"/>
+          </a:fillRef>
+          <a:effectRef idx="2">
+            <a:schemeClr val="accent1"/>
+          </a:effectRef>
+          <a:fontRef idx="minor">
+            <a:schemeClr val="lt1"/>
+          </a:fontRef>
+        </p:style>
+        <p:txBody>
+          <a:bodyPr rtlCol="0" anchor="ctr" lIns="118872" rIns="118872" tIns="109728"/>
+          <a:lstStyle/>
+          <a:p>
+            <a:pPr algn="ctr"/>
+            <a:r>
+              <a:rPr sz="1700" b="1">
+                <a:solidFill>
+                  <a:srgbClr val="202020"/>
+                </a:solidFill>
+                <a:latin typeface="Microsoft YaHei"/>
+              </a:rPr>
+              <a:t>记忆流</a:t>
+            </a:r>
+          </a:p>
+          <a:p>
+            <a:pPr algn="ctr"/>
+            <a:r>
+              <a:rPr sz="1500">
+                <a:solidFill>
+                  <a:srgbClr val="202020"/>
+                </a:solidFill>
+                <a:latin typeface="Microsoft YaHei"/>
+              </a:rPr>
+              <a:t>Memory Stream</a:t>
+            </a:r>
+          </a:p>
+        </p:txBody>
+      </p:sp>
       <p:cxnSp>
         <p:nvCxnSpPr>
-          <p:cNvPr id="19" name="直接连接符 18"/>
+          <p:cNvPr id="7" name="Connector 6"/>
           <p:cNvCxnSpPr/>
           <p:nvPr/>
         </p:nvCxnSpPr>
         <p:spPr>
           <a:xfrm>
-            <a:off x="137584" y="897467"/>
-            <a:ext cx="11616267" cy="0"/>
+            <a:off x="2286000" y="2331720"/>
+            <a:ext cx="1371600" cy="0"/>
           </a:xfrm>
           <a:prstGeom prst="line">
             <a:avLst/>
           </a:prstGeom>
-          <a:ln w="34925" cmpd="sng">
+          <a:ln w="17780">
             <a:solidFill>
-              <a:schemeClr val="accent6"/>
+              <a:srgbClr val="C00000"/>
             </a:solidFill>
           </a:ln>
+          <a:effectLst/>
         </p:spPr>
         <p:style>
-          <a:lnRef idx="1">
+          <a:lnRef idx="2">
             <a:schemeClr val="accent1"/>
           </a:lnRef>
           <a:fillRef idx="0">
             <a:schemeClr val="accent1"/>
           </a:fillRef>
-          <a:effectRef idx="0">
+          <a:effectRef idx="1">
             <a:schemeClr val="accent1"/>
           </a:effectRef>
           <a:fontRef idx="minor">
@@ -4700,155 +5202,86 @@
       </p:cxnSp>
       <p:sp>
         <p:nvSpPr>
-          <p:cNvPr id="3076" name="AutoShape 2" descr="http://img1.gtimg.com/rushidao/pics/hv1/229/47/1914/124470064.jpg"/>
-          <p:cNvSpPr>
-            <a:spLocks noChangeAspect="1"/>
-          </p:cNvSpPr>
-          <p:nvPr/>
-        </p:nvSpPr>
-        <p:spPr>
-          <a:xfrm>
-            <a:off x="207433" y="-192616"/>
-            <a:ext cx="406400" cy="406400"/>
-          </a:xfrm>
-          <a:prstGeom prst="rect">
-            <a:avLst/>
-          </a:prstGeom>
-          <a:noFill/>
-          <a:ln w="9525">
-            <a:noFill/>
+          <p:cNvPr id="8" name="Rounded Rectangle 7"/>
+          <p:cNvSpPr/>
+          <p:nvPr/>
+        </p:nvSpPr>
+        <p:spPr>
+          <a:xfrm>
+            <a:off x="3657600" y="1856231"/>
+            <a:ext cx="1920240" cy="960120"/>
+          </a:xfrm>
+          <a:prstGeom prst="roundRect">
+            <a:avLst/>
+          </a:prstGeom>
+          <a:solidFill>
+            <a:srgbClr val="F8F8F8"/>
+          </a:solidFill>
+          <a:ln w="17780">
+            <a:solidFill>
+              <a:srgbClr val="C00000"/>
+            </a:solidFill>
           </a:ln>
-        </p:spPr>
-        <p:txBody>
-          <a:bodyPr/>
-          <a:p>
-            <a:pPr eaLnBrk="1" hangingPunct="1"/>
-            <a:endParaRPr lang="zh-CN" altLang="en-US" sz="2400" dirty="0">
-              <a:latin typeface="Arial" panose="020B0604020202090204" pitchFamily="34" charset="0"/>
-            </a:endParaRPr>
-          </a:p>
-        </p:txBody>
-      </p:sp>
-      <p:sp>
-        <p:nvSpPr>
-          <p:cNvPr id="2" name="文本框 1"/>
-          <p:cNvSpPr txBox="1"/>
-          <p:nvPr/>
-        </p:nvSpPr>
-        <p:spPr>
-          <a:xfrm>
-            <a:off x="343535" y="1112520"/>
-            <a:ext cx="5334635" cy="521970"/>
-          </a:xfrm>
-          <a:prstGeom prst="rect">
-            <a:avLst/>
-          </a:prstGeom>
-          <a:noFill/>
-        </p:spPr>
-        <p:txBody>
-          <a:bodyPr wrap="square" rtlCol="0" anchor="t">
-            <a:spAutoFit/>
-          </a:bodyPr>
-          <a:lstStyle/>
-          <a:p>
-            <a:r>
-              <a:t>对应论文机制</a:t>
-            </a:r>
-          </a:p>
-        </p:txBody>
-      </p:sp>
-      <p:sp>
-        <p:nvSpPr>
-          <p:cNvPr id="5" name="标题 1"/>
-          <p:cNvSpPr txBox="1"/>
-          <p:nvPr>
-            <p:custDataLst>
-              <p:tags r:id="rId1"/>
-            </p:custDataLst>
-          </p:nvPr>
-        </p:nvSpPr>
-        <p:spPr>
-          <a:xfrm>
-            <a:off x="463137" y="174094"/>
-            <a:ext cx="11409315" cy="736490"/>
-          </a:xfrm>
-          <a:prstGeom prst="rect">
-            <a:avLst/>
-          </a:prstGeom>
-        </p:spPr>
-        <p:txBody>
-          <a:bodyPr>
-            <a:noAutofit/>
-          </a:bodyPr>
-          <a:lstStyle>
-            <a:lvl1pPr algn="l" defTabSz="914400" rtl="0" eaLnBrk="1" latinLnBrk="0" hangingPunct="1">
-              <a:lnSpc>
-                <a:spcPct val="90000"/>
-              </a:lnSpc>
-              <a:spcBef>
-                <a:spcPct val="0"/>
-              </a:spcBef>
-              <a:buNone/>
-              <a:defRPr sz="4400" kern="1200">
-                <a:solidFill>
-                  <a:schemeClr val="tx1"/>
-                </a:solidFill>
-                <a:latin typeface="+mj-lt"/>
-                <a:ea typeface="+mj-ea"/>
-                <a:cs typeface="+mj-cs"/>
-              </a:defRPr>
-            </a:lvl1pPr>
-          </a:lstStyle>
-          <a:p>
-            <a:r>
-              <a:t>论文复现补充</a:t>
-            </a:r>
-          </a:p>
-        </p:txBody>
-      </p:sp>
-      <p:sp>
-        <p:nvSpPr>
-          <p:cNvPr id="3" name="文本框 2"/>
-          <p:cNvSpPr txBox="1"/>
-          <p:nvPr/>
-        </p:nvSpPr>
-        <p:spPr>
-          <a:xfrm>
-            <a:off x="462915" y="2960370"/>
-            <a:ext cx="5334635" cy="521970"/>
-          </a:xfrm>
-          <a:prstGeom prst="rect">
-            <a:avLst/>
-          </a:prstGeom>
-          <a:noFill/>
-        </p:spPr>
-        <p:txBody>
-          <a:bodyPr wrap="square" rtlCol="0" anchor="t">
-            <a:spAutoFit/>
-          </a:bodyPr>
-          <a:lstStyle/>
-          <a:p>
-            <a:r>
-              <a:t>机制映射</a:t>
+          <a:effectLst/>
+        </p:spPr>
+        <p:style>
+          <a:lnRef idx="1">
+            <a:schemeClr val="accent1"/>
+          </a:lnRef>
+          <a:fillRef idx="3">
+            <a:schemeClr val="accent1"/>
+          </a:fillRef>
+          <a:effectRef idx="2">
+            <a:schemeClr val="accent1"/>
+          </a:effectRef>
+          <a:fontRef idx="minor">
+            <a:schemeClr val="lt1"/>
+          </a:fontRef>
+        </p:style>
+        <p:txBody>
+          <a:bodyPr rtlCol="0" anchor="ctr" lIns="118872" rIns="118872" tIns="109728"/>
+          <a:lstStyle/>
+          <a:p>
+            <a:pPr algn="ctr"/>
+            <a:r>
+              <a:rPr sz="1700" b="1">
+                <a:solidFill>
+                  <a:srgbClr val="202020"/>
+                </a:solidFill>
+                <a:latin typeface="Microsoft YaHei"/>
+              </a:rPr>
+              <a:t>检索</a:t>
+            </a:r>
+          </a:p>
+          <a:p>
+            <a:pPr algn="ctr"/>
+            <a:r>
+              <a:rPr sz="1500">
+                <a:solidFill>
+                  <a:srgbClr val="202020"/>
+                </a:solidFill>
+                <a:latin typeface="Microsoft YaHei"/>
+              </a:rPr>
+              <a:t>Retrieval</a:t>
             </a:r>
           </a:p>
         </p:txBody>
       </p:sp>
       <p:cxnSp>
         <p:nvCxnSpPr>
-          <p:cNvPr id="14" name="Connector 4"/>
+          <p:cNvPr id="9" name="Connector 8"/>
           <p:cNvCxnSpPr/>
           <p:nvPr/>
         </p:nvCxnSpPr>
         <p:spPr>
           <a:xfrm>
-            <a:off x="1965960" y="2148840"/>
-            <a:ext cx="1874520" cy="0"/>
+            <a:off x="5577840" y="2331720"/>
+            <a:ext cx="1600200" cy="0"/>
           </a:xfrm>
           <a:prstGeom prst="line">
             <a:avLst/>
           </a:prstGeom>
-          <a:ln w="21590">
+          <a:ln w="17780">
             <a:solidFill>
               <a:srgbClr val="C00000"/>
             </a:solidFill>
@@ -4870,21 +5303,88 @@
           </a:fontRef>
         </p:style>
       </p:cxnSp>
+      <p:sp>
+        <p:nvSpPr>
+          <p:cNvPr id="10" name="Rounded Rectangle 9"/>
+          <p:cNvSpPr/>
+          <p:nvPr/>
+        </p:nvSpPr>
+        <p:spPr>
+          <a:xfrm>
+            <a:off x="7178040" y="1856231"/>
+            <a:ext cx="1965960" cy="960120"/>
+          </a:xfrm>
+          <a:prstGeom prst="roundRect">
+            <a:avLst/>
+          </a:prstGeom>
+          <a:solidFill>
+            <a:srgbClr val="F8F8F8"/>
+          </a:solidFill>
+          <a:ln w="17780">
+            <a:solidFill>
+              <a:srgbClr val="C00000"/>
+            </a:solidFill>
+          </a:ln>
+          <a:effectLst/>
+        </p:spPr>
+        <p:style>
+          <a:lnRef idx="1">
+            <a:schemeClr val="accent1"/>
+          </a:lnRef>
+          <a:fillRef idx="3">
+            <a:schemeClr val="accent1"/>
+          </a:fillRef>
+          <a:effectRef idx="2">
+            <a:schemeClr val="accent1"/>
+          </a:effectRef>
+          <a:fontRef idx="minor">
+            <a:schemeClr val="lt1"/>
+          </a:fontRef>
+        </p:style>
+        <p:txBody>
+          <a:bodyPr rtlCol="0" anchor="ctr" lIns="118872" rIns="118872" tIns="109728"/>
+          <a:lstStyle/>
+          <a:p>
+            <a:pPr algn="ctr"/>
+            <a:r>
+              <a:rPr sz="1700" b="1">
+                <a:solidFill>
+                  <a:srgbClr val="202020"/>
+                </a:solidFill>
+                <a:latin typeface="Microsoft YaHei"/>
+              </a:rPr>
+              <a:t>计划</a:t>
+            </a:r>
+          </a:p>
+          <a:p>
+            <a:pPr algn="ctr"/>
+            <a:r>
+              <a:rPr sz="1500">
+                <a:solidFill>
+                  <a:srgbClr val="202020"/>
+                </a:solidFill>
+                <a:latin typeface="Microsoft YaHei"/>
+              </a:rPr>
+              <a:t>Planning</a:t>
+            </a:r>
+          </a:p>
+        </p:txBody>
+      </p:sp>
       <p:cxnSp>
         <p:nvCxnSpPr>
-          <p:cNvPr id="15" name="Connector 5"/>
+          <p:cNvPr id="11" name="Connector 10"/>
           <p:cNvCxnSpPr/>
           <p:nvPr/>
         </p:nvCxnSpPr>
         <p:spPr>
           <a:xfrm>
-            <a:off x="5532120" y="2148840"/>
-            <a:ext cx="1874520" cy="0"/>
+            <a:off x="9144000" y="2331720"/>
+            <a:ext cx="914400" cy="0"/>
           </a:xfrm>
           <a:prstGeom prst="line">
             <a:avLst/>
           </a:prstGeom>
-          <a:ln w="21590">
+          <a:ln w="17780">
             <a:solidFill>
               <a:srgbClr val="C00000"/>
             </a:solidFill>
@@ -4906,21 +5406,24 @@
           </a:fontRef>
         </p:style>
       </p:cxnSp>
-      <p:cxnSp>
-        <p:nvCxnSpPr>
-          <p:cNvPr id="16" name="Connector 6"/>
-          <p:cNvCxnSpPr/>
-          <p:nvPr/>
-        </p:nvCxnSpPr>
-        <p:spPr>
-          <a:xfrm>
-            <a:off x="9098280" y="2148840"/>
-            <a:ext cx="1234440" cy="0"/>
-          </a:xfrm>
-          <a:prstGeom prst="line">
-            <a:avLst/>
-          </a:prstGeom>
-          <a:ln w="21590">
+      <p:sp>
+        <p:nvSpPr>
+          <p:cNvPr id="12" name="Rounded Rectangle 11"/>
+          <p:cNvSpPr/>
+          <p:nvPr/>
+        </p:nvSpPr>
+        <p:spPr>
+          <a:xfrm>
+            <a:off x="10058400" y="1856231"/>
+            <a:ext cx="1664208" cy="960120"/>
+          </a:xfrm>
+          <a:prstGeom prst="roundRect">
+            <a:avLst/>
+          </a:prstGeom>
+          <a:solidFill>
+            <a:srgbClr val="F8F8F8"/>
+          </a:solidFill>
+          <a:ln w="17780">
             <a:solidFill>
               <a:srgbClr val="C00000"/>
             </a:solidFill>
@@ -4928,45 +5431,6 @@
           <a:effectLst/>
         </p:spPr>
         <p:style>
-          <a:lnRef idx="2">
-            <a:schemeClr val="accent1"/>
-          </a:lnRef>
-          <a:fillRef idx="0">
-            <a:schemeClr val="accent1"/>
-          </a:fillRef>
-          <a:effectRef idx="1">
-            <a:schemeClr val="accent1"/>
-          </a:effectRef>
-          <a:fontRef idx="minor">
-            <a:schemeClr val="tx1"/>
-          </a:fontRef>
-        </p:style>
-      </p:cxnSp>
-      <p:sp>
-        <p:nvSpPr>
-          <p:cNvPr id="17" name="Rounded Rectangle 7"/>
-          <p:cNvSpPr/>
-          <p:nvPr/>
-        </p:nvSpPr>
-        <p:spPr>
-          <a:xfrm>
-            <a:off x="685800" y="1664208"/>
-            <a:ext cx="1554480" cy="969264"/>
-          </a:xfrm>
-          <a:prstGeom prst="roundRect">
-            <a:avLst/>
-          </a:prstGeom>
-          <a:solidFill>
-            <a:srgbClr val="F5F5F5"/>
-          </a:solidFill>
-          <a:ln w="15240">
-            <a:solidFill>
-              <a:srgbClr val="C00000"/>
-            </a:solidFill>
-          </a:ln>
-          <a:effectLst/>
-        </p:spPr>
-        <p:style>
           <a:lnRef idx="1">
             <a:schemeClr val="accent1"/>
           </a:lnRef>
@@ -4981,40 +5445,54 @@
           </a:fontRef>
         </p:style>
         <p:txBody>
-          <a:bodyPr wrap="square" lIns="73152" rIns="73152" rtlCol="0" anchor="ctr"/>
-          <a:lstStyle/>
-          <a:p>
-            <a:r>
-              <a:t>Memory Stream</a:t>
-            </a:r>
-          </a:p>
-          <a:p>
-            <a:r>
-              <a:t>统一记忆流</a:t>
-            </a:r>
-          </a:p>
-        </p:txBody>
-      </p:sp>
-      <p:sp>
-        <p:nvSpPr>
-          <p:cNvPr id="18" name="Rounded Rectangle 8"/>
+          <a:bodyPr rtlCol="0" anchor="ctr" lIns="118872" rIns="118872" tIns="109728"/>
+          <a:lstStyle/>
+          <a:p>
+            <a:pPr algn="ctr"/>
+            <a:r>
+              <a:rPr sz="1700" b="1">
+                <a:solidFill>
+                  <a:srgbClr val="202020"/>
+                </a:solidFill>
+                <a:latin typeface="Microsoft YaHei"/>
+              </a:rPr>
+              <a:t>反思</a:t>
+            </a:r>
+          </a:p>
+          <a:p>
+            <a:pPr algn="ctr"/>
+            <a:r>
+              <a:rPr sz="1500">
+                <a:solidFill>
+                  <a:srgbClr val="202020"/>
+                </a:solidFill>
+                <a:latin typeface="Microsoft YaHei"/>
+              </a:rPr>
+              <a:t>Reflection</a:t>
+            </a:r>
+          </a:p>
+        </p:txBody>
+      </p:sp>
+      <p:sp>
+        <p:nvSpPr>
+          <p:cNvPr id="13" name="Rectangle 12"/>
           <p:cNvSpPr/>
           <p:nvPr/>
         </p:nvSpPr>
         <p:spPr>
           <a:xfrm>
-            <a:off x="3657600" y="1664208"/>
-            <a:ext cx="1920240" cy="969264"/>
-          </a:xfrm>
-          <a:prstGeom prst="roundRect">
+            <a:off x="457200" y="3383280"/>
+            <a:ext cx="146304" cy="146304"/>
+          </a:xfrm>
+          <a:prstGeom prst="rect">
             <a:avLst/>
           </a:prstGeom>
           <a:solidFill>
-            <a:srgbClr val="F5F5F5"/>
+            <a:srgbClr val="1C4491"/>
           </a:solidFill>
-          <a:ln w="15240">
+          <a:ln>
             <a:solidFill>
-              <a:srgbClr val="C00000"/>
+              <a:srgbClr val="1C4491"/>
             </a:solidFill>
           </a:ln>
           <a:effectLst/>
@@ -5034,40 +5512,173 @@
           </a:fontRef>
         </p:style>
         <p:txBody>
-          <a:bodyPr wrap="square" lIns="73152" rIns="73152" rtlCol="0" anchor="ctr"/>
-          <a:lstStyle/>
-          <a:p>
-            <a:r>
-              <a:t>Retrieval</a:t>
-            </a:r>
-          </a:p>
-          <a:p>
-            <a:r>
-              <a:t>检索函数</a:t>
-            </a:r>
-          </a:p>
-        </p:txBody>
-      </p:sp>
-      <p:sp>
-        <p:nvSpPr>
-          <p:cNvPr id="20" name="Rounded Rectangle 9"/>
+          <a:bodyPr rtlCol="0" anchor="ctr"/>
+          <a:lstStyle/>
+          <a:p>
+            <a:pPr algn="ctr"/>
+          </a:p>
+        </p:txBody>
+      </p:sp>
+      <p:sp>
+        <p:nvSpPr>
+          <p:cNvPr id="14" name="TextBox 13"/>
+          <p:cNvSpPr txBox="1"/>
+          <p:nvPr/>
+        </p:nvSpPr>
+        <p:spPr>
+          <a:xfrm>
+            <a:off x="749808" y="3291840"/>
+            <a:ext cx="5212080" cy="438912"/>
+          </a:xfrm>
+          <a:prstGeom prst="rect">
+            <a:avLst/>
+          </a:prstGeom>
+          <a:noFill/>
+          <a:effectLst/>
+        </p:spPr>
+        <p:txBody>
+          <a:bodyPr wrap="none" lIns="0" rIns="0" tIns="0" bIns="0">
+            <a:spAutoFit/>
+          </a:bodyPr>
+          <a:lstStyle/>
+          <a:p>
+            <a:r>
+              <a:rPr sz="2400" b="1">
+                <a:solidFill>
+                  <a:srgbClr val="C00000"/>
+                </a:solidFill>
+                <a:latin typeface="Microsoft YaHei"/>
+              </a:rPr>
+              <a:t>说明</a:t>
+            </a:r>
+          </a:p>
+        </p:txBody>
+      </p:sp>
+      <p:sp>
+        <p:nvSpPr>
+          <p:cNvPr id="15" name="TextBox 14"/>
+          <p:cNvSpPr txBox="1"/>
+          <p:nvPr/>
+        </p:nvSpPr>
+        <p:spPr>
+          <a:xfrm>
+            <a:off x="749808" y="3822191"/>
+            <a:ext cx="5394960" cy="274320"/>
+          </a:xfrm>
+          <a:prstGeom prst="rect">
+            <a:avLst/>
+          </a:prstGeom>
+          <a:noFill/>
+          <a:effectLst/>
+        </p:spPr>
+        <p:txBody>
+          <a:bodyPr wrap="none" lIns="0" rIns="0" tIns="0" bIns="0">
+            <a:spAutoFit/>
+          </a:bodyPr>
+          <a:lstStyle/>
+          <a:p>
+            <a:r>
+              <a:rPr sz="1500" b="0">
+                <a:solidFill>
+                  <a:srgbClr val="202020"/>
+                </a:solidFill>
+                <a:latin typeface="Microsoft YaHei"/>
+              </a:rPr>
+              <a:t>观察、行动、对话和反思都写入统一记忆流。</a:t>
+            </a:r>
+          </a:p>
+        </p:txBody>
+      </p:sp>
+      <p:sp>
+        <p:nvSpPr>
+          <p:cNvPr id="16" name="TextBox 15"/>
+          <p:cNvSpPr txBox="1"/>
+          <p:nvPr/>
+        </p:nvSpPr>
+        <p:spPr>
+          <a:xfrm>
+            <a:off x="749808" y="4142231"/>
+            <a:ext cx="5394960" cy="274320"/>
+          </a:xfrm>
+          <a:prstGeom prst="rect">
+            <a:avLst/>
+          </a:prstGeom>
+          <a:noFill/>
+          <a:effectLst/>
+        </p:spPr>
+        <p:txBody>
+          <a:bodyPr wrap="none" lIns="0" rIns="0" tIns="0" bIns="0">
+            <a:spAutoFit/>
+          </a:bodyPr>
+          <a:lstStyle/>
+          <a:p>
+            <a:r>
+              <a:rPr sz="1500" b="0">
+                <a:solidFill>
+                  <a:srgbClr val="202020"/>
+                </a:solidFill>
+                <a:latin typeface="Microsoft YaHei"/>
+              </a:rPr>
+              <a:t>检索按重要性、近因、地点、社交关系和相关性打分。</a:t>
+            </a:r>
+          </a:p>
+        </p:txBody>
+      </p:sp>
+      <p:sp>
+        <p:nvSpPr>
+          <p:cNvPr id="17" name="TextBox 16"/>
+          <p:cNvSpPr txBox="1"/>
+          <p:nvPr/>
+        </p:nvSpPr>
+        <p:spPr>
+          <a:xfrm>
+            <a:off x="749808" y="4462272"/>
+            <a:ext cx="5394960" cy="274320"/>
+          </a:xfrm>
+          <a:prstGeom prst="rect">
+            <a:avLst/>
+          </a:prstGeom>
+          <a:noFill/>
+          <a:effectLst/>
+        </p:spPr>
+        <p:txBody>
+          <a:bodyPr wrap="none" lIns="0" rIns="0" tIns="0" bIns="0">
+            <a:spAutoFit/>
+          </a:bodyPr>
+          <a:lstStyle/>
+          <a:p>
+            <a:r>
+              <a:rPr sz="1500" b="0">
+                <a:solidFill>
+                  <a:srgbClr val="202020"/>
+                </a:solidFill>
+                <a:latin typeface="Microsoft YaHei"/>
+              </a:rPr>
+              <a:t>计划提供日程骨架，检索记忆影响当前行动。</a:t>
+            </a:r>
+          </a:p>
+        </p:txBody>
+      </p:sp>
+      <p:sp>
+        <p:nvSpPr>
+          <p:cNvPr id="18" name="Rounded Rectangle 17"/>
           <p:cNvSpPr/>
           <p:nvPr/>
         </p:nvSpPr>
         <p:spPr>
           <a:xfrm>
-            <a:off x="7205472" y="1664208"/>
-            <a:ext cx="1965960" cy="969264"/>
+            <a:off x="6720840" y="3822191"/>
+            <a:ext cx="4892040" cy="1572768"/>
           </a:xfrm>
           <a:prstGeom prst="roundRect">
             <a:avLst/>
           </a:prstGeom>
           <a:solidFill>
-            <a:srgbClr val="F5F5F5"/>
+            <a:srgbClr val="202020"/>
           </a:solidFill>
-          <a:ln w="15240">
+          <a:ln>
             <a:solidFill>
-              <a:srgbClr val="C00000"/>
+              <a:srgbClr val="202020"/>
             </a:solidFill>
           </a:ln>
           <a:effectLst/>
@@ -5087,117 +5698,51 @@
           </a:fontRef>
         </p:style>
         <p:txBody>
-          <a:bodyPr wrap="square" lIns="73152" rIns="73152" rtlCol="0" anchor="ctr"/>
-          <a:lstStyle/>
-          <a:p>
-            <a:r>
-              <a:t>Planning</a:t>
-            </a:r>
-          </a:p>
-          <a:p>
-            <a:r>
-              <a:t>计划行动</a:t>
-            </a:r>
-          </a:p>
-        </p:txBody>
-      </p:sp>
-      <p:sp>
-        <p:nvSpPr>
-          <p:cNvPr id="21" name="Rounded Rectangle 10"/>
-          <p:cNvSpPr/>
-          <p:nvPr/>
-        </p:nvSpPr>
-        <p:spPr>
-          <a:xfrm>
-            <a:off x="10131552" y="1664208"/>
-            <a:ext cx="1600200" cy="969264"/>
-          </a:xfrm>
-          <a:prstGeom prst="roundRect">
-            <a:avLst/>
-          </a:prstGeom>
-          <a:solidFill>
-            <a:srgbClr val="F5F5F5"/>
-          </a:solidFill>
-          <a:ln w="15240">
-            <a:solidFill>
-              <a:srgbClr val="C00000"/>
-            </a:solidFill>
-          </a:ln>
-          <a:effectLst/>
-        </p:spPr>
-        <p:style>
-          <a:lnRef idx="1">
-            <a:schemeClr val="accent1"/>
-          </a:lnRef>
-          <a:fillRef idx="3">
-            <a:schemeClr val="accent1"/>
-          </a:fillRef>
-          <a:effectRef idx="2">
-            <a:schemeClr val="accent1"/>
-          </a:effectRef>
-          <a:fontRef idx="minor">
-            <a:schemeClr val="lt1"/>
-          </a:fontRef>
-        </p:style>
-        <p:txBody>
-          <a:bodyPr wrap="square" lIns="73152" rIns="73152" rtlCol="0" anchor="ctr"/>
-          <a:lstStyle/>
-          <a:p>
-            <a:r>
-              <a:t>Reflection</a:t>
-            </a:r>
-          </a:p>
-          <a:p>
-            <a:r>
-              <a:t>抽象总结</a:t>
-            </a:r>
-          </a:p>
-        </p:txBody>
-      </p:sp>
-      <p:sp>
-        <p:nvSpPr>
-          <p:cNvPr id="22" name="Rounded Rectangle 13"/>
-          <p:cNvSpPr/>
-          <p:nvPr/>
-        </p:nvSpPr>
-        <p:spPr>
-          <a:xfrm>
-            <a:off x="7062470" y="3753612"/>
-            <a:ext cx="4343400" cy="1600200"/>
-          </a:xfrm>
-          <a:prstGeom prst="roundRect">
-            <a:avLst/>
-          </a:prstGeom>
-          <a:solidFill>
-            <a:srgbClr val="232323"/>
-          </a:solidFill>
-          <a:ln>
-            <a:solidFill>
-              <a:srgbClr val="232323"/>
-            </a:solidFill>
-          </a:ln>
-          <a:effectLst/>
-        </p:spPr>
-        <p:style>
-          <a:lnRef idx="1">
-            <a:schemeClr val="accent1"/>
-          </a:lnRef>
-          <a:fillRef idx="3">
-            <a:schemeClr val="accent1"/>
-          </a:fillRef>
-          <a:effectRef idx="2">
-            <a:schemeClr val="accent1"/>
-          </a:effectRef>
-          <a:fontRef idx="minor">
-            <a:schemeClr val="lt1"/>
-          </a:fontRef>
-        </p:style>
-        <p:txBody>
-          <a:bodyPr wrap="none" lIns="109728" tIns="91440" rIns="73152" bIns="73152" rtlCol="0" anchor="ctr"/>
-          <a:lstStyle/>
-          <a:p>
-            <a:r>
-              <a:t>观察、行动、对话和反思都写入 memory stream；检索按重要性、近因、地点、社交关系和相关性打分；计划提供日程骨架，检索记忆影响当前行动。</a:t>
+          <a:bodyPr rtlCol="0" anchor="ctr" lIns="201168" rIns="201168" tIns="146304"/>
+          <a:lstStyle/>
+          <a:p>
+            <a:pPr algn="ctr"/>
+            <a:r>
+              <a:rPr sz="1500" b="1">
+                <a:solidFill>
+                  <a:srgbClr val="FFFFFF"/>
+                </a:solidFill>
+                <a:latin typeface="Microsoft YaHei"/>
+              </a:rPr>
+              <a:t>论文机制映射</a:t>
+            </a:r>
+          </a:p>
+          <a:p>
+            <a:r>
+              <a:rPr sz="1200">
+                <a:solidFill>
+                  <a:srgbClr val="FFFFFF"/>
+                </a:solidFill>
+                <a:latin typeface="Microsoft YaHei"/>
+              </a:rPr>
+              <a:t>观察、行动、对话和反思都写入统一记忆流。</a:t>
+            </a:r>
+          </a:p>
+          <a:p>
+            <a:r>
+              <a:rPr sz="1200">
+                <a:solidFill>
+                  <a:srgbClr val="FFFFFF"/>
+                </a:solidFill>
+                <a:latin typeface="Microsoft YaHei"/>
+              </a:rPr>
+              <a:t>检索按重要性、近因、地点、社交关系和相关性打分。</a:t>
+            </a:r>
+          </a:p>
+          <a:p>
+            <a:r>
+              <a:rPr sz="1200">
+                <a:solidFill>
+                  <a:srgbClr val="FFFFFF"/>
+                </a:solidFill>
+                <a:latin typeface="Microsoft YaHei"/>
+              </a:rPr>
+              <a:t>计划提供日程骨架，检索记忆影响当前行动。</a:t>
             </a:r>
           </a:p>
         </p:txBody>
@@ -5213,12 +5758,6 @@
 <file path=ppt/slides/slide12.xml><?xml version="1.0" encoding="utf-8"?>
 <p:sld xmlns:a="http://schemas.openxmlformats.org/drawingml/2006/main" xmlns:p="http://schemas.openxmlformats.org/presentationml/2006/main" xmlns:r="http://schemas.openxmlformats.org/officeDocument/2006/relationships">
   <p:cSld>
-    <p:bg>
-      <p:bgPr>
-        <a:noFill/>
-        <a:effectLst/>
-      </p:bgPr>
-    </p:bg>
     <p:spTree>
       <p:nvGrpSpPr>
         <p:cNvPr id="1" name=""/>
@@ -5226,34 +5765,264 @@
         <p:nvPr/>
       </p:nvGrpSpPr>
       <p:grpSpPr/>
+      <p:sp>
+        <p:nvSpPr>
+          <p:cNvPr id="2" name="TextBox 1"/>
+          <p:cNvSpPr txBox="1"/>
+          <p:nvPr/>
+        </p:nvSpPr>
+        <p:spPr>
+          <a:xfrm>
+            <a:off x="566928" y="201168"/>
+            <a:ext cx="6583680" cy="658368"/>
+          </a:xfrm>
+          <a:prstGeom prst="rect">
+            <a:avLst/>
+          </a:prstGeom>
+          <a:noFill/>
+          <a:effectLst/>
+        </p:spPr>
+        <p:txBody>
+          <a:bodyPr wrap="none" lIns="0" rIns="0" tIns="0" bIns="0">
+            <a:spAutoFit/>
+          </a:bodyPr>
+          <a:lstStyle/>
+          <a:p>
+            <a:r>
+              <a:rPr sz="3400" b="1">
+                <a:solidFill>
+                  <a:srgbClr val="C00000"/>
+                </a:solidFill>
+                <a:latin typeface="SimHei"/>
+              </a:rPr>
+              <a:t>局限与改进</a:t>
+            </a:r>
+          </a:p>
+        </p:txBody>
+      </p:sp>
+      <p:sp>
+        <p:nvSpPr>
+          <p:cNvPr id="3" name="Rectangle 2"/>
+          <p:cNvSpPr/>
+          <p:nvPr/>
+        </p:nvSpPr>
+        <p:spPr>
+          <a:xfrm>
+            <a:off x="137160" y="987552"/>
+            <a:ext cx="11887200" cy="36576"/>
+          </a:xfrm>
+          <a:prstGeom prst="rect">
+            <a:avLst/>
+          </a:prstGeom>
+          <a:solidFill>
+            <a:srgbClr val="EB4C60"/>
+          </a:solidFill>
+          <a:ln>
+            <a:solidFill>
+              <a:srgbClr val="EB4C60"/>
+            </a:solidFill>
+          </a:ln>
+          <a:effectLst/>
+        </p:spPr>
+        <p:style>
+          <a:lnRef idx="1">
+            <a:schemeClr val="accent1"/>
+          </a:lnRef>
+          <a:fillRef idx="3">
+            <a:schemeClr val="accent1"/>
+          </a:fillRef>
+          <a:effectRef idx="2">
+            <a:schemeClr val="accent1"/>
+          </a:effectRef>
+          <a:fontRef idx="minor">
+            <a:schemeClr val="lt1"/>
+          </a:fontRef>
+        </p:style>
+        <p:txBody>
+          <a:bodyPr rtlCol="0" anchor="ctr"/>
+          <a:lstStyle/>
+          <a:p>
+            <a:pPr algn="ctr"/>
+          </a:p>
+        </p:txBody>
+      </p:sp>
+      <p:sp>
+        <p:nvSpPr>
+          <p:cNvPr id="4" name="Rectangle 3"/>
+          <p:cNvSpPr/>
+          <p:nvPr/>
+        </p:nvSpPr>
+        <p:spPr>
+          <a:xfrm>
+            <a:off x="457200" y="1426464"/>
+            <a:ext cx="146304" cy="146304"/>
+          </a:xfrm>
+          <a:prstGeom prst="rect">
+            <a:avLst/>
+          </a:prstGeom>
+          <a:solidFill>
+            <a:srgbClr val="1C4491"/>
+          </a:solidFill>
+          <a:ln>
+            <a:solidFill>
+              <a:srgbClr val="1C4491"/>
+            </a:solidFill>
+          </a:ln>
+          <a:effectLst/>
+        </p:spPr>
+        <p:style>
+          <a:lnRef idx="1">
+            <a:schemeClr val="accent1"/>
+          </a:lnRef>
+          <a:fillRef idx="3">
+            <a:schemeClr val="accent1"/>
+          </a:fillRef>
+          <a:effectRef idx="2">
+            <a:schemeClr val="accent1"/>
+          </a:effectRef>
+          <a:fontRef idx="minor">
+            <a:schemeClr val="lt1"/>
+          </a:fontRef>
+        </p:style>
+        <p:txBody>
+          <a:bodyPr rtlCol="0" anchor="ctr"/>
+          <a:lstStyle/>
+          <a:p>
+            <a:pPr algn="ctr"/>
+          </a:p>
+        </p:txBody>
+      </p:sp>
+      <p:sp>
+        <p:nvSpPr>
+          <p:cNvPr id="5" name="TextBox 4"/>
+          <p:cNvSpPr txBox="1"/>
+          <p:nvPr/>
+        </p:nvSpPr>
+        <p:spPr>
+          <a:xfrm>
+            <a:off x="749808" y="1335024"/>
+            <a:ext cx="5212080" cy="438912"/>
+          </a:xfrm>
+          <a:prstGeom prst="rect">
+            <a:avLst/>
+          </a:prstGeom>
+          <a:noFill/>
+          <a:effectLst/>
+        </p:spPr>
+        <p:txBody>
+          <a:bodyPr wrap="none" lIns="0" rIns="0" tIns="0" bIns="0">
+            <a:spAutoFit/>
+          </a:bodyPr>
+          <a:lstStyle/>
+          <a:p>
+            <a:r>
+              <a:rPr sz="2400" b="1">
+                <a:solidFill>
+                  <a:srgbClr val="C00000"/>
+                </a:solidFill>
+                <a:latin typeface="Microsoft YaHei"/>
+              </a:rPr>
+              <a:t>课程复现与原论文差距</a:t>
+            </a:r>
+          </a:p>
+        </p:txBody>
+      </p:sp>
+      <p:sp>
+        <p:nvSpPr>
+          <p:cNvPr id="6" name="Rounded Rectangle 5"/>
+          <p:cNvSpPr/>
+          <p:nvPr/>
+        </p:nvSpPr>
+        <p:spPr>
+          <a:xfrm>
+            <a:off x="685800" y="1856231"/>
+            <a:ext cx="1600200" cy="960120"/>
+          </a:xfrm>
+          <a:prstGeom prst="roundRect">
+            <a:avLst/>
+          </a:prstGeom>
+          <a:solidFill>
+            <a:srgbClr val="F8F8F8"/>
+          </a:solidFill>
+          <a:ln w="17780">
+            <a:solidFill>
+              <a:srgbClr val="C00000"/>
+            </a:solidFill>
+          </a:ln>
+          <a:effectLst/>
+        </p:spPr>
+        <p:style>
+          <a:lnRef idx="1">
+            <a:schemeClr val="accent1"/>
+          </a:lnRef>
+          <a:fillRef idx="3">
+            <a:schemeClr val="accent1"/>
+          </a:fillRef>
+          <a:effectRef idx="2">
+            <a:schemeClr val="accent1"/>
+          </a:effectRef>
+          <a:fontRef idx="minor">
+            <a:schemeClr val="lt1"/>
+          </a:fontRef>
+        </p:style>
+        <p:txBody>
+          <a:bodyPr rtlCol="0" anchor="ctr" lIns="118872" rIns="118872" tIns="109728"/>
+          <a:lstStyle/>
+          <a:p>
+            <a:pPr algn="ctr"/>
+            <a:r>
+              <a:rPr sz="1700" b="1">
+                <a:solidFill>
+                  <a:srgbClr val="202020"/>
+                </a:solidFill>
+                <a:latin typeface="Microsoft YaHei"/>
+              </a:rPr>
+              <a:t>规模</a:t>
+            </a:r>
+          </a:p>
+          <a:p>
+            <a:pPr algn="ctr"/>
+            <a:r>
+              <a:rPr sz="1500">
+                <a:solidFill>
+                  <a:srgbClr val="202020"/>
+                </a:solidFill>
+                <a:latin typeface="Microsoft YaHei"/>
+              </a:rPr>
+              <a:t>3 个角色</a:t>
+            </a:r>
+          </a:p>
+        </p:txBody>
+      </p:sp>
       <p:cxnSp>
         <p:nvCxnSpPr>
-          <p:cNvPr id="19" name="直接连接符 18"/>
+          <p:cNvPr id="7" name="Connector 6"/>
           <p:cNvCxnSpPr/>
           <p:nvPr/>
         </p:nvCxnSpPr>
         <p:spPr>
           <a:xfrm>
-            <a:off x="137584" y="897467"/>
-            <a:ext cx="11616267" cy="0"/>
+            <a:off x="2286000" y="2331720"/>
+            <a:ext cx="1371600" cy="0"/>
           </a:xfrm>
           <a:prstGeom prst="line">
             <a:avLst/>
           </a:prstGeom>
-          <a:ln w="34925" cmpd="sng">
+          <a:ln w="17780">
             <a:solidFill>
-              <a:schemeClr val="accent6"/>
+              <a:srgbClr val="C00000"/>
             </a:solidFill>
           </a:ln>
+          <a:effectLst/>
         </p:spPr>
         <p:style>
-          <a:lnRef idx="1">
+          <a:lnRef idx="2">
             <a:schemeClr val="accent1"/>
           </a:lnRef>
           <a:fillRef idx="0">
             <a:schemeClr val="accent1"/>
           </a:fillRef>
-          <a:effectRef idx="0">
+          <a:effectRef idx="1">
             <a:schemeClr val="accent1"/>
           </a:effectRef>
           <a:fontRef idx="minor">
@@ -5263,155 +6032,86 @@
       </p:cxnSp>
       <p:sp>
         <p:nvSpPr>
-          <p:cNvPr id="3076" name="AutoShape 2" descr="http://img1.gtimg.com/rushidao/pics/hv1/229/47/1914/124470064.jpg"/>
-          <p:cNvSpPr>
-            <a:spLocks noChangeAspect="1"/>
-          </p:cNvSpPr>
-          <p:nvPr/>
-        </p:nvSpPr>
-        <p:spPr>
-          <a:xfrm>
-            <a:off x="207433" y="-192616"/>
-            <a:ext cx="406400" cy="406400"/>
-          </a:xfrm>
-          <a:prstGeom prst="rect">
-            <a:avLst/>
-          </a:prstGeom>
-          <a:noFill/>
-          <a:ln w="9525">
-            <a:noFill/>
+          <p:cNvPr id="8" name="Rounded Rectangle 7"/>
+          <p:cNvSpPr/>
+          <p:nvPr/>
+        </p:nvSpPr>
+        <p:spPr>
+          <a:xfrm>
+            <a:off x="3657600" y="1856231"/>
+            <a:ext cx="1920240" cy="960120"/>
+          </a:xfrm>
+          <a:prstGeom prst="roundRect">
+            <a:avLst/>
+          </a:prstGeom>
+          <a:solidFill>
+            <a:srgbClr val="F8F8F8"/>
+          </a:solidFill>
+          <a:ln w="17780">
+            <a:solidFill>
+              <a:srgbClr val="C00000"/>
+            </a:solidFill>
           </a:ln>
-        </p:spPr>
-        <p:txBody>
-          <a:bodyPr/>
-          <a:p>
-            <a:pPr eaLnBrk="1" hangingPunct="1"/>
-            <a:endParaRPr lang="zh-CN" altLang="en-US" sz="2400" dirty="0">
-              <a:latin typeface="Arial" panose="020B0604020202090204" pitchFamily="34" charset="0"/>
-            </a:endParaRPr>
-          </a:p>
-        </p:txBody>
-      </p:sp>
-      <p:sp>
-        <p:nvSpPr>
-          <p:cNvPr id="2" name="文本框 1"/>
-          <p:cNvSpPr txBox="1"/>
-          <p:nvPr/>
-        </p:nvSpPr>
-        <p:spPr>
-          <a:xfrm>
-            <a:off x="343535" y="1112520"/>
-            <a:ext cx="5334635" cy="521970"/>
-          </a:xfrm>
-          <a:prstGeom prst="rect">
-            <a:avLst/>
-          </a:prstGeom>
-          <a:noFill/>
-        </p:spPr>
-        <p:txBody>
-          <a:bodyPr wrap="square" rtlCol="0" anchor="t">
-            <a:spAutoFit/>
-          </a:bodyPr>
-          <a:lstStyle/>
-          <a:p>
-            <a:r>
-              <a:t>局限与改进</a:t>
-            </a:r>
-          </a:p>
-        </p:txBody>
-      </p:sp>
-      <p:sp>
-        <p:nvSpPr>
-          <p:cNvPr id="5" name="标题 1"/>
-          <p:cNvSpPr txBox="1"/>
-          <p:nvPr>
-            <p:custDataLst>
-              <p:tags r:id="rId1"/>
-            </p:custDataLst>
-          </p:nvPr>
-        </p:nvSpPr>
-        <p:spPr>
-          <a:xfrm>
-            <a:off x="463137" y="174094"/>
-            <a:ext cx="11409315" cy="736490"/>
-          </a:xfrm>
-          <a:prstGeom prst="rect">
-            <a:avLst/>
-          </a:prstGeom>
-        </p:spPr>
-        <p:txBody>
-          <a:bodyPr>
-            <a:noAutofit/>
-          </a:bodyPr>
-          <a:lstStyle>
-            <a:lvl1pPr algn="l" defTabSz="914400" rtl="0" eaLnBrk="1" latinLnBrk="0" hangingPunct="1">
-              <a:lnSpc>
-                <a:spcPct val="90000"/>
-              </a:lnSpc>
-              <a:spcBef>
-                <a:spcPct val="0"/>
-              </a:spcBef>
-              <a:buNone/>
-              <a:defRPr sz="4400" kern="1200">
-                <a:solidFill>
-                  <a:schemeClr val="tx1"/>
-                </a:solidFill>
-                <a:latin typeface="+mj-lt"/>
-                <a:ea typeface="+mj-ea"/>
-                <a:cs typeface="+mj-cs"/>
-              </a:defRPr>
-            </a:lvl1pPr>
-          </a:lstStyle>
-          <a:p>
-            <a:r>
-              <a:t>论文复现补充</a:t>
-            </a:r>
-          </a:p>
-        </p:txBody>
-      </p:sp>
-      <p:sp>
-        <p:nvSpPr>
-          <p:cNvPr id="3" name="文本框 2"/>
-          <p:cNvSpPr txBox="1"/>
-          <p:nvPr/>
-        </p:nvSpPr>
-        <p:spPr>
-          <a:xfrm>
-            <a:off x="462915" y="2960370"/>
-            <a:ext cx="5334635" cy="521970"/>
-          </a:xfrm>
-          <a:prstGeom prst="rect">
-            <a:avLst/>
-          </a:prstGeom>
-          <a:noFill/>
-        </p:spPr>
-        <p:txBody>
-          <a:bodyPr wrap="square" rtlCol="0" anchor="t">
-            <a:spAutoFit/>
-          </a:bodyPr>
-          <a:lstStyle/>
-          <a:p>
-            <a:r>
-              <a:t>后续方向</a:t>
+          <a:effectLst/>
+        </p:spPr>
+        <p:style>
+          <a:lnRef idx="1">
+            <a:schemeClr val="accent1"/>
+          </a:lnRef>
+          <a:fillRef idx="3">
+            <a:schemeClr val="accent1"/>
+          </a:fillRef>
+          <a:effectRef idx="2">
+            <a:schemeClr val="accent1"/>
+          </a:effectRef>
+          <a:fontRef idx="minor">
+            <a:schemeClr val="lt1"/>
+          </a:fontRef>
+        </p:style>
+        <p:txBody>
+          <a:bodyPr rtlCol="0" anchor="ctr" lIns="118872" rIns="118872" tIns="109728"/>
+          <a:lstStyle/>
+          <a:p>
+            <a:pPr algn="ctr"/>
+            <a:r>
+              <a:rPr sz="1700" b="1">
+                <a:solidFill>
+                  <a:srgbClr val="202020"/>
+                </a:solidFill>
+                <a:latin typeface="Microsoft YaHei"/>
+              </a:rPr>
+              <a:t>世界</a:t>
+            </a:r>
+          </a:p>
+          <a:p>
+            <a:pPr algn="ctr"/>
+            <a:r>
+              <a:rPr sz="1500">
+                <a:solidFill>
+                  <a:srgbClr val="202020"/>
+                </a:solidFill>
+                <a:latin typeface="Microsoft YaHei"/>
+              </a:rPr>
+              <a:t>4 个地点</a:t>
             </a:r>
           </a:p>
         </p:txBody>
       </p:sp>
       <p:cxnSp>
         <p:nvCxnSpPr>
-          <p:cNvPr id="14" name="Connector 4"/>
+          <p:cNvPr id="9" name="Connector 8"/>
           <p:cNvCxnSpPr/>
           <p:nvPr/>
         </p:nvCxnSpPr>
         <p:spPr>
           <a:xfrm>
-            <a:off x="1965960" y="2148840"/>
-            <a:ext cx="1874520" cy="0"/>
+            <a:off x="5577840" y="2331720"/>
+            <a:ext cx="1600200" cy="0"/>
           </a:xfrm>
           <a:prstGeom prst="line">
             <a:avLst/>
           </a:prstGeom>
-          <a:ln w="21590">
+          <a:ln w="17780">
             <a:solidFill>
               <a:srgbClr val="C00000"/>
             </a:solidFill>
@@ -5433,21 +6133,88 @@
           </a:fontRef>
         </p:style>
       </p:cxnSp>
+      <p:sp>
+        <p:nvSpPr>
+          <p:cNvPr id="10" name="Rounded Rectangle 9"/>
+          <p:cNvSpPr/>
+          <p:nvPr/>
+        </p:nvSpPr>
+        <p:spPr>
+          <a:xfrm>
+            <a:off x="7178040" y="1856231"/>
+            <a:ext cx="1965960" cy="960120"/>
+          </a:xfrm>
+          <a:prstGeom prst="roundRect">
+            <a:avLst/>
+          </a:prstGeom>
+          <a:solidFill>
+            <a:srgbClr val="F8F8F8"/>
+          </a:solidFill>
+          <a:ln w="17780">
+            <a:solidFill>
+              <a:srgbClr val="C00000"/>
+            </a:solidFill>
+          </a:ln>
+          <a:effectLst/>
+        </p:spPr>
+        <p:style>
+          <a:lnRef idx="1">
+            <a:schemeClr val="accent1"/>
+          </a:lnRef>
+          <a:fillRef idx="3">
+            <a:schemeClr val="accent1"/>
+          </a:fillRef>
+          <a:effectRef idx="2">
+            <a:schemeClr val="accent1"/>
+          </a:effectRef>
+          <a:fontRef idx="minor">
+            <a:schemeClr val="lt1"/>
+          </a:fontRef>
+        </p:style>
+        <p:txBody>
+          <a:bodyPr rtlCol="0" anchor="ctr" lIns="118872" rIns="118872" tIns="109728"/>
+          <a:lstStyle/>
+          <a:p>
+            <a:pPr algn="ctr"/>
+            <a:r>
+              <a:rPr sz="1700" b="1">
+                <a:solidFill>
+                  <a:srgbClr val="202020"/>
+                </a:solidFill>
+                <a:latin typeface="Microsoft YaHei"/>
+              </a:rPr>
+              <a:t>检索</a:t>
+            </a:r>
+          </a:p>
+          <a:p>
+            <a:pPr algn="ctr"/>
+            <a:r>
+              <a:rPr sz="1500">
+                <a:solidFill>
+                  <a:srgbClr val="202020"/>
+                </a:solidFill>
+                <a:latin typeface="Microsoft YaHei"/>
+              </a:rPr>
+              <a:t>待接 embedding</a:t>
+            </a:r>
+          </a:p>
+        </p:txBody>
+      </p:sp>
       <p:cxnSp>
         <p:nvCxnSpPr>
-          <p:cNvPr id="15" name="Connector 5"/>
+          <p:cNvPr id="11" name="Connector 10"/>
           <p:cNvCxnSpPr/>
           <p:nvPr/>
         </p:nvCxnSpPr>
         <p:spPr>
           <a:xfrm>
-            <a:off x="5532120" y="2148840"/>
-            <a:ext cx="1874520" cy="0"/>
+            <a:off x="9144000" y="2331720"/>
+            <a:ext cx="914400" cy="0"/>
           </a:xfrm>
           <a:prstGeom prst="line">
             <a:avLst/>
           </a:prstGeom>
-          <a:ln w="21590">
+          <a:ln w="17780">
             <a:solidFill>
               <a:srgbClr val="C00000"/>
             </a:solidFill>
@@ -5469,21 +6236,24 @@
           </a:fontRef>
         </p:style>
       </p:cxnSp>
-      <p:cxnSp>
-        <p:nvCxnSpPr>
-          <p:cNvPr id="16" name="Connector 6"/>
-          <p:cNvCxnSpPr/>
-          <p:nvPr/>
-        </p:nvCxnSpPr>
-        <p:spPr>
-          <a:xfrm>
-            <a:off x="9098280" y="2148840"/>
-            <a:ext cx="1234440" cy="0"/>
-          </a:xfrm>
-          <a:prstGeom prst="line">
-            <a:avLst/>
-          </a:prstGeom>
-          <a:ln w="21590">
+      <p:sp>
+        <p:nvSpPr>
+          <p:cNvPr id="12" name="Rounded Rectangle 11"/>
+          <p:cNvSpPr/>
+          <p:nvPr/>
+        </p:nvSpPr>
+        <p:spPr>
+          <a:xfrm>
+            <a:off x="10058400" y="1856231"/>
+            <a:ext cx="1664208" cy="960120"/>
+          </a:xfrm>
+          <a:prstGeom prst="roundRect">
+            <a:avLst/>
+          </a:prstGeom>
+          <a:solidFill>
+            <a:srgbClr val="F8F8F8"/>
+          </a:solidFill>
+          <a:ln w="17780">
             <a:solidFill>
               <a:srgbClr val="C00000"/>
             </a:solidFill>
@@ -5491,45 +6261,6 @@
           <a:effectLst/>
         </p:spPr>
         <p:style>
-          <a:lnRef idx="2">
-            <a:schemeClr val="accent1"/>
-          </a:lnRef>
-          <a:fillRef idx="0">
-            <a:schemeClr val="accent1"/>
-          </a:fillRef>
-          <a:effectRef idx="1">
-            <a:schemeClr val="accent1"/>
-          </a:effectRef>
-          <a:fontRef idx="minor">
-            <a:schemeClr val="tx1"/>
-          </a:fontRef>
-        </p:style>
-      </p:cxnSp>
-      <p:sp>
-        <p:nvSpPr>
-          <p:cNvPr id="17" name="Rounded Rectangle 7"/>
-          <p:cNvSpPr/>
-          <p:nvPr/>
-        </p:nvSpPr>
-        <p:spPr>
-          <a:xfrm>
-            <a:off x="685800" y="1664208"/>
-            <a:ext cx="1554480" cy="969264"/>
-          </a:xfrm>
-          <a:prstGeom prst="roundRect">
-            <a:avLst/>
-          </a:prstGeom>
-          <a:solidFill>
-            <a:srgbClr val="F5F5F5"/>
-          </a:solidFill>
-          <a:ln w="15240">
-            <a:solidFill>
-              <a:srgbClr val="C00000"/>
-            </a:solidFill>
-          </a:ln>
-          <a:effectLst/>
-        </p:spPr>
-        <p:style>
           <a:lnRef idx="1">
             <a:schemeClr val="accent1"/>
           </a:lnRef>
@@ -5544,40 +6275,54 @@
           </a:fontRef>
         </p:style>
         <p:txBody>
-          <a:bodyPr wrap="square" lIns="73152" rIns="73152" rtlCol="0" anchor="ctr"/>
-          <a:lstStyle/>
-          <a:p>
-            <a:r>
-              <a:t>规模</a:t>
-            </a:r>
-          </a:p>
-          <a:p>
-            <a:r>
-              <a:t>3 个角色</a:t>
-            </a:r>
-          </a:p>
-        </p:txBody>
-      </p:sp>
-      <p:sp>
-        <p:nvSpPr>
-          <p:cNvPr id="18" name="Rounded Rectangle 8"/>
+          <a:bodyPr rtlCol="0" anchor="ctr" lIns="118872" rIns="118872" tIns="109728"/>
+          <a:lstStyle/>
+          <a:p>
+            <a:pPr algn="ctr"/>
+            <a:r>
+              <a:rPr sz="1700" b="1">
+                <a:solidFill>
+                  <a:srgbClr val="202020"/>
+                </a:solidFill>
+                <a:latin typeface="Microsoft YaHei"/>
+              </a:rPr>
+              <a:t>计划</a:t>
+            </a:r>
+          </a:p>
+          <a:p>
+            <a:pPr algn="ctr"/>
+            <a:r>
+              <a:rPr sz="1500">
+                <a:solidFill>
+                  <a:srgbClr val="202020"/>
+                </a:solidFill>
+                <a:latin typeface="Microsoft YaHei"/>
+              </a:rPr>
+              <a:t>待扩展多日</a:t>
+            </a:r>
+          </a:p>
+        </p:txBody>
+      </p:sp>
+      <p:sp>
+        <p:nvSpPr>
+          <p:cNvPr id="13" name="Rectangle 12"/>
           <p:cNvSpPr/>
           <p:nvPr/>
         </p:nvSpPr>
         <p:spPr>
           <a:xfrm>
-            <a:off x="3657600" y="1664208"/>
-            <a:ext cx="1920240" cy="969264"/>
-          </a:xfrm>
-          <a:prstGeom prst="roundRect">
+            <a:off x="457200" y="3383280"/>
+            <a:ext cx="146304" cy="146304"/>
+          </a:xfrm>
+          <a:prstGeom prst="rect">
             <a:avLst/>
           </a:prstGeom>
           <a:solidFill>
-            <a:srgbClr val="F5F5F5"/>
+            <a:srgbClr val="1C4491"/>
           </a:solidFill>
-          <a:ln w="15240">
+          <a:ln>
             <a:solidFill>
-              <a:srgbClr val="C00000"/>
+              <a:srgbClr val="1C4491"/>
             </a:solidFill>
           </a:ln>
           <a:effectLst/>
@@ -5597,40 +6342,173 @@
           </a:fontRef>
         </p:style>
         <p:txBody>
-          <a:bodyPr wrap="square" lIns="73152" rIns="73152" rtlCol="0" anchor="ctr"/>
-          <a:lstStyle/>
-          <a:p>
-            <a:r>
-              <a:t>世界</a:t>
-            </a:r>
-          </a:p>
-          <a:p>
-            <a:r>
-              <a:t>4 个地点</a:t>
-            </a:r>
-          </a:p>
-        </p:txBody>
-      </p:sp>
-      <p:sp>
-        <p:nvSpPr>
-          <p:cNvPr id="20" name="Rounded Rectangle 9"/>
+          <a:bodyPr rtlCol="0" anchor="ctr"/>
+          <a:lstStyle/>
+          <a:p>
+            <a:pPr algn="ctr"/>
+          </a:p>
+        </p:txBody>
+      </p:sp>
+      <p:sp>
+        <p:nvSpPr>
+          <p:cNvPr id="14" name="TextBox 13"/>
+          <p:cNvSpPr txBox="1"/>
+          <p:nvPr/>
+        </p:nvSpPr>
+        <p:spPr>
+          <a:xfrm>
+            <a:off x="749808" y="3291840"/>
+            <a:ext cx="5212080" cy="438912"/>
+          </a:xfrm>
+          <a:prstGeom prst="rect">
+            <a:avLst/>
+          </a:prstGeom>
+          <a:noFill/>
+          <a:effectLst/>
+        </p:spPr>
+        <p:txBody>
+          <a:bodyPr wrap="none" lIns="0" rIns="0" tIns="0" bIns="0">
+            <a:spAutoFit/>
+          </a:bodyPr>
+          <a:lstStyle/>
+          <a:p>
+            <a:r>
+              <a:rPr sz="2400" b="1">
+                <a:solidFill>
+                  <a:srgbClr val="C00000"/>
+                </a:solidFill>
+                <a:latin typeface="Microsoft YaHei"/>
+              </a:rPr>
+              <a:t>说明</a:t>
+            </a:r>
+          </a:p>
+        </p:txBody>
+      </p:sp>
+      <p:sp>
+        <p:nvSpPr>
+          <p:cNvPr id="15" name="TextBox 14"/>
+          <p:cNvSpPr txBox="1"/>
+          <p:nvPr/>
+        </p:nvSpPr>
+        <p:spPr>
+          <a:xfrm>
+            <a:off x="749808" y="3822191"/>
+            <a:ext cx="5394960" cy="274320"/>
+          </a:xfrm>
+          <a:prstGeom prst="rect">
+            <a:avLst/>
+          </a:prstGeom>
+          <a:noFill/>
+          <a:effectLst/>
+        </p:spPr>
+        <p:txBody>
+          <a:bodyPr wrap="none" lIns="0" rIns="0" tIns="0" bIns="0">
+            <a:spAutoFit/>
+          </a:bodyPr>
+          <a:lstStyle/>
+          <a:p>
+            <a:r>
+              <a:rPr sz="1500" b="0">
+                <a:solidFill>
+                  <a:srgbClr val="202020"/>
+                </a:solidFill>
+                <a:latin typeface="Microsoft YaHei"/>
+              </a:rPr>
+              <a:t>当前是课程作业级复现，不是 Stanford Smallville 全量工程。</a:t>
+            </a:r>
+          </a:p>
+        </p:txBody>
+      </p:sp>
+      <p:sp>
+        <p:nvSpPr>
+          <p:cNvPr id="16" name="TextBox 15"/>
+          <p:cNvSpPr txBox="1"/>
+          <p:nvPr/>
+        </p:nvSpPr>
+        <p:spPr>
+          <a:xfrm>
+            <a:off x="749808" y="4142231"/>
+            <a:ext cx="5394960" cy="274320"/>
+          </a:xfrm>
+          <a:prstGeom prst="rect">
+            <a:avLst/>
+          </a:prstGeom>
+          <a:noFill/>
+          <a:effectLst/>
+        </p:spPr>
+        <p:txBody>
+          <a:bodyPr wrap="none" lIns="0" rIns="0" tIns="0" bIns="0">
+            <a:spAutoFit/>
+          </a:bodyPr>
+          <a:lstStyle/>
+          <a:p>
+            <a:r>
+              <a:rPr sz="1500" b="0">
+                <a:solidFill>
+                  <a:srgbClr val="202020"/>
+                </a:solidFill>
+                <a:latin typeface="Microsoft YaHei"/>
+              </a:rPr>
+              <a:t>后续可扩展 25 个 agent 与多日长期计划。</a:t>
+            </a:r>
+          </a:p>
+        </p:txBody>
+      </p:sp>
+      <p:sp>
+        <p:nvSpPr>
+          <p:cNvPr id="17" name="TextBox 16"/>
+          <p:cNvSpPr txBox="1"/>
+          <p:nvPr/>
+        </p:nvSpPr>
+        <p:spPr>
+          <a:xfrm>
+            <a:off x="749808" y="4462272"/>
+            <a:ext cx="5394960" cy="274320"/>
+          </a:xfrm>
+          <a:prstGeom prst="rect">
+            <a:avLst/>
+          </a:prstGeom>
+          <a:noFill/>
+          <a:effectLst/>
+        </p:spPr>
+        <p:txBody>
+          <a:bodyPr wrap="none" lIns="0" rIns="0" tIns="0" bIns="0">
+            <a:spAutoFit/>
+          </a:bodyPr>
+          <a:lstStyle/>
+          <a:p>
+            <a:r>
+              <a:rPr sz="1500" b="0">
+                <a:solidFill>
+                  <a:srgbClr val="202020"/>
+                </a:solidFill>
+                <a:latin typeface="Microsoft YaHei"/>
+              </a:rPr>
+              <a:t>检索可进一步接入 embedding retrieval。</a:t>
+            </a:r>
+          </a:p>
+        </p:txBody>
+      </p:sp>
+      <p:sp>
+        <p:nvSpPr>
+          <p:cNvPr id="18" name="Rounded Rectangle 17"/>
           <p:cNvSpPr/>
           <p:nvPr/>
         </p:nvSpPr>
         <p:spPr>
           <a:xfrm>
-            <a:off x="7205472" y="1664208"/>
-            <a:ext cx="1965960" cy="969264"/>
+            <a:off x="6720840" y="3822191"/>
+            <a:ext cx="4892040" cy="1572768"/>
           </a:xfrm>
           <a:prstGeom prst="roundRect">
             <a:avLst/>
           </a:prstGeom>
           <a:solidFill>
-            <a:srgbClr val="F5F5F5"/>
+            <a:srgbClr val="202020"/>
           </a:solidFill>
-          <a:ln w="15240">
+          <a:ln>
             <a:solidFill>
-              <a:srgbClr val="C00000"/>
+              <a:srgbClr val="202020"/>
             </a:solidFill>
           </a:ln>
           <a:effectLst/>
@@ -5650,122 +6528,62 @@
           </a:fontRef>
         </p:style>
         <p:txBody>
-          <a:bodyPr wrap="square" lIns="73152" rIns="73152" rtlCol="0" anchor="ctr"/>
-          <a:lstStyle/>
-          <a:p>
-            <a:r>
-              <a:t>检索</a:t>
-            </a:r>
-          </a:p>
-          <a:p>
-            <a:r>
-              <a:t>待接 embedding</a:t>
-            </a:r>
-          </a:p>
-        </p:txBody>
-      </p:sp>
-      <p:sp>
-        <p:nvSpPr>
-          <p:cNvPr id="21" name="Rounded Rectangle 10"/>
-          <p:cNvSpPr/>
-          <p:nvPr/>
-        </p:nvSpPr>
-        <p:spPr>
-          <a:xfrm>
-            <a:off x="10131552" y="1664208"/>
-            <a:ext cx="1600200" cy="969264"/>
-          </a:xfrm>
-          <a:prstGeom prst="roundRect">
-            <a:avLst/>
-          </a:prstGeom>
-          <a:solidFill>
-            <a:srgbClr val="F5F5F5"/>
-          </a:solidFill>
-          <a:ln w="15240">
-            <a:solidFill>
-              <a:srgbClr val="C00000"/>
-            </a:solidFill>
-          </a:ln>
-          <a:effectLst/>
-        </p:spPr>
-        <p:style>
-          <a:lnRef idx="1">
-            <a:schemeClr val="accent1"/>
-          </a:lnRef>
-          <a:fillRef idx="3">
-            <a:schemeClr val="accent1"/>
-          </a:fillRef>
-          <a:effectRef idx="2">
-            <a:schemeClr val="accent1"/>
-          </a:effectRef>
-          <a:fontRef idx="minor">
-            <a:schemeClr val="lt1"/>
-          </a:fontRef>
-        </p:style>
-        <p:txBody>
-          <a:bodyPr wrap="square" lIns="73152" rIns="73152" rtlCol="0" anchor="ctr"/>
-          <a:lstStyle/>
-          <a:p>
-            <a:r>
-              <a:t>计划</a:t>
-            </a:r>
-          </a:p>
-          <a:p>
-            <a:r>
-              <a:t>待扩展多日</a:t>
-            </a:r>
-          </a:p>
-        </p:txBody>
-      </p:sp>
-      <p:sp>
-        <p:nvSpPr>
-          <p:cNvPr id="22" name="Rounded Rectangle 13"/>
-          <p:cNvSpPr/>
-          <p:nvPr/>
-        </p:nvSpPr>
-        <p:spPr>
-          <a:xfrm>
-            <a:off x="7062470" y="3753612"/>
-            <a:ext cx="4343400" cy="1600200"/>
-          </a:xfrm>
-          <a:prstGeom prst="roundRect">
-            <a:avLst/>
-          </a:prstGeom>
-          <a:solidFill>
-            <a:srgbClr val="232323"/>
-          </a:solidFill>
-          <a:ln>
-            <a:solidFill>
-              <a:srgbClr val="232323"/>
-            </a:solidFill>
-          </a:ln>
-          <a:effectLst/>
-        </p:spPr>
-        <p:style>
-          <a:lnRef idx="1">
-            <a:schemeClr val="accent1"/>
-          </a:lnRef>
-          <a:fillRef idx="3">
-            <a:schemeClr val="accent1"/>
-          </a:fillRef>
-          <a:effectRef idx="2">
-            <a:schemeClr val="accent1"/>
-          </a:effectRef>
-          <a:fontRef idx="minor">
-            <a:schemeClr val="lt1"/>
-          </a:fontRef>
-        </p:style>
-        <p:txBody>
-          <a:bodyPr wrap="none" lIns="109728" tIns="91440" rIns="73152" bIns="73152" rtlCol="0" anchor="ctr"/>
-          <a:lstStyle/>
-          <a:p>
-            <a:r>
+          <a:bodyPr rtlCol="0" anchor="ctr" lIns="201168" rIns="201168" tIns="146304"/>
+          <a:lstStyle/>
+          <a:p>
+            <a:pPr algn="ctr"/>
+            <a:r>
+              <a:rPr sz="1500" b="1">
+                <a:solidFill>
+                  <a:srgbClr val="FFFFFF"/>
+                </a:solidFill>
+                <a:latin typeface="Microsoft YaHei"/>
+              </a:rPr>
+              <a:t>后续方向</a:t>
+            </a:r>
+          </a:p>
+          <a:p>
+            <a:r>
+              <a:rPr sz="1200">
+                <a:solidFill>
+                  <a:srgbClr val="FFFFFF"/>
+                </a:solidFill>
+                <a:latin typeface="Microsoft YaHei"/>
+              </a:rPr>
               <a:t>当前是课程作业级复现，不是 Stanford Smallville 全量工程。</a:t>
             </a:r>
           </a:p>
           <a:p>
             <a:r>
-              <a:t>后续可以扩展 25 个 agent、embedding retrieval、多日长期计划、更丰富社交关系和开放式事件解析。</a:t>
+              <a:rPr sz="1200">
+                <a:solidFill>
+                  <a:srgbClr val="FFFFFF"/>
+                </a:solidFill>
+                <a:latin typeface="Microsoft YaHei"/>
+              </a:rPr>
+              <a:t>后续可扩展 25 个 agent 与多日长期计划。</a:t>
+            </a:r>
+          </a:p>
+          <a:p>
+            <a:r>
+              <a:rPr sz="1200">
+                <a:solidFill>
+                  <a:srgbClr val="FFFFFF"/>
+                </a:solidFill>
+                <a:latin typeface="Microsoft YaHei"/>
+              </a:rPr>
+              <a:t>检索可进一步接入 embedding retrieval。</a:t>
+            </a:r>
+          </a:p>
+          <a:p>
+            <a:r>
+              <a:rPr sz="1200">
+                <a:solidFill>
+                  <a:srgbClr val="FFFFFF"/>
+                </a:solidFill>
+                <a:latin typeface="Microsoft YaHei"/>
+              </a:rPr>
+              <a:t>也可以加入更丰富的社交关系和开放式事件解析。</a:t>
             </a:r>
           </a:p>
         </p:txBody>
@@ -8910,12 +9728,6 @@
 <file path=ppt/slides/slide8.xml><?xml version="1.0" encoding="utf-8"?>
 <p:sld xmlns:a="http://schemas.openxmlformats.org/drawingml/2006/main" xmlns:p="http://schemas.openxmlformats.org/presentationml/2006/main" xmlns:r="http://schemas.openxmlformats.org/officeDocument/2006/relationships">
   <p:cSld>
-    <p:bg>
-      <p:bgPr>
-        <a:noFill/>
-        <a:effectLst/>
-      </p:bgPr>
-    </p:bg>
     <p:spTree>
       <p:nvGrpSpPr>
         <p:cNvPr id="1" name=""/>
@@ -8923,34 +9735,264 @@
         <p:nvPr/>
       </p:nvGrpSpPr>
       <p:grpSpPr/>
+      <p:sp>
+        <p:nvSpPr>
+          <p:cNvPr id="2" name="TextBox 1"/>
+          <p:cNvSpPr txBox="1"/>
+          <p:nvPr/>
+        </p:nvSpPr>
+        <p:spPr>
+          <a:xfrm>
+            <a:off x="566928" y="201168"/>
+            <a:ext cx="6583680" cy="658368"/>
+          </a:xfrm>
+          <a:prstGeom prst="rect">
+            <a:avLst/>
+          </a:prstGeom>
+          <a:noFill/>
+          <a:effectLst/>
+        </p:spPr>
+        <p:txBody>
+          <a:bodyPr wrap="none" lIns="0" rIns="0" tIns="0" bIns="0">
+            <a:spAutoFit/>
+          </a:bodyPr>
+          <a:lstStyle/>
+          <a:p>
+            <a:r>
+              <a:rPr sz="3400" b="1">
+                <a:solidFill>
+                  <a:srgbClr val="C00000"/>
+                </a:solidFill>
+                <a:latin typeface="SimHei"/>
+              </a:rPr>
+              <a:t>论文复现补充</a:t>
+            </a:r>
+          </a:p>
+        </p:txBody>
+      </p:sp>
+      <p:sp>
+        <p:nvSpPr>
+          <p:cNvPr id="3" name="Rectangle 2"/>
+          <p:cNvSpPr/>
+          <p:nvPr/>
+        </p:nvSpPr>
+        <p:spPr>
+          <a:xfrm>
+            <a:off x="137160" y="987552"/>
+            <a:ext cx="11887200" cy="36576"/>
+          </a:xfrm>
+          <a:prstGeom prst="rect">
+            <a:avLst/>
+          </a:prstGeom>
+          <a:solidFill>
+            <a:srgbClr val="EB4C60"/>
+          </a:solidFill>
+          <a:ln>
+            <a:solidFill>
+              <a:srgbClr val="EB4C60"/>
+            </a:solidFill>
+          </a:ln>
+          <a:effectLst/>
+        </p:spPr>
+        <p:style>
+          <a:lnRef idx="1">
+            <a:schemeClr val="accent1"/>
+          </a:lnRef>
+          <a:fillRef idx="3">
+            <a:schemeClr val="accent1"/>
+          </a:fillRef>
+          <a:effectRef idx="2">
+            <a:schemeClr val="accent1"/>
+          </a:effectRef>
+          <a:fontRef idx="minor">
+            <a:schemeClr val="lt1"/>
+          </a:fontRef>
+        </p:style>
+        <p:txBody>
+          <a:bodyPr rtlCol="0" anchor="ctr"/>
+          <a:lstStyle/>
+          <a:p>
+            <a:pPr algn="ctr"/>
+          </a:p>
+        </p:txBody>
+      </p:sp>
+      <p:sp>
+        <p:nvSpPr>
+          <p:cNvPr id="4" name="Rectangle 3"/>
+          <p:cNvSpPr/>
+          <p:nvPr/>
+        </p:nvSpPr>
+        <p:spPr>
+          <a:xfrm>
+            <a:off x="457200" y="1426464"/>
+            <a:ext cx="146304" cy="146304"/>
+          </a:xfrm>
+          <a:prstGeom prst="rect">
+            <a:avLst/>
+          </a:prstGeom>
+          <a:solidFill>
+            <a:srgbClr val="1C4491"/>
+          </a:solidFill>
+          <a:ln>
+            <a:solidFill>
+              <a:srgbClr val="1C4491"/>
+            </a:solidFill>
+          </a:ln>
+          <a:effectLst/>
+        </p:spPr>
+        <p:style>
+          <a:lnRef idx="1">
+            <a:schemeClr val="accent1"/>
+          </a:lnRef>
+          <a:fillRef idx="3">
+            <a:schemeClr val="accent1"/>
+          </a:fillRef>
+          <a:effectRef idx="2">
+            <a:schemeClr val="accent1"/>
+          </a:effectRef>
+          <a:fontRef idx="minor">
+            <a:schemeClr val="lt1"/>
+          </a:fontRef>
+        </p:style>
+        <p:txBody>
+          <a:bodyPr rtlCol="0" anchor="ctr"/>
+          <a:lstStyle/>
+          <a:p>
+            <a:pPr algn="ctr"/>
+          </a:p>
+        </p:txBody>
+      </p:sp>
+      <p:sp>
+        <p:nvSpPr>
+          <p:cNvPr id="5" name="TextBox 4"/>
+          <p:cNvSpPr txBox="1"/>
+          <p:nvPr/>
+        </p:nvSpPr>
+        <p:spPr>
+          <a:xfrm>
+            <a:off x="749808" y="1335024"/>
+            <a:ext cx="5212080" cy="438912"/>
+          </a:xfrm>
+          <a:prstGeom prst="rect">
+            <a:avLst/>
+          </a:prstGeom>
+          <a:noFill/>
+          <a:effectLst/>
+        </p:spPr>
+        <p:txBody>
+          <a:bodyPr wrap="none" lIns="0" rIns="0" tIns="0" bIns="0">
+            <a:spAutoFit/>
+          </a:bodyPr>
+          <a:lstStyle/>
+          <a:p>
+            <a:r>
+              <a:rPr sz="2400" b="1">
+                <a:solidFill>
+                  <a:srgbClr val="C00000"/>
+                </a:solidFill>
+                <a:latin typeface="Microsoft YaHei"/>
+              </a:rPr>
+              <a:t>核心认知闭环</a:t>
+            </a:r>
+          </a:p>
+        </p:txBody>
+      </p:sp>
+      <p:sp>
+        <p:nvSpPr>
+          <p:cNvPr id="6" name="Rounded Rectangle 5"/>
+          <p:cNvSpPr/>
+          <p:nvPr/>
+        </p:nvSpPr>
+        <p:spPr>
+          <a:xfrm>
+            <a:off x="685800" y="1856231"/>
+            <a:ext cx="1600200" cy="960120"/>
+          </a:xfrm>
+          <a:prstGeom prst="roundRect">
+            <a:avLst/>
+          </a:prstGeom>
+          <a:solidFill>
+            <a:srgbClr val="F8F8F8"/>
+          </a:solidFill>
+          <a:ln w="17780">
+            <a:solidFill>
+              <a:srgbClr val="C00000"/>
+            </a:solidFill>
+          </a:ln>
+          <a:effectLst/>
+        </p:spPr>
+        <p:style>
+          <a:lnRef idx="1">
+            <a:schemeClr val="accent1"/>
+          </a:lnRef>
+          <a:fillRef idx="3">
+            <a:schemeClr val="accent1"/>
+          </a:fillRef>
+          <a:effectRef idx="2">
+            <a:schemeClr val="accent1"/>
+          </a:effectRef>
+          <a:fontRef idx="minor">
+            <a:schemeClr val="lt1"/>
+          </a:fontRef>
+        </p:style>
+        <p:txBody>
+          <a:bodyPr rtlCol="0" anchor="ctr" lIns="118872" rIns="118872" tIns="109728"/>
+          <a:lstStyle/>
+          <a:p>
+            <a:pPr algn="ctr"/>
+            <a:r>
+              <a:rPr sz="1700" b="1">
+                <a:solidFill>
+                  <a:srgbClr val="202020"/>
+                </a:solidFill>
+                <a:latin typeface="Microsoft YaHei"/>
+              </a:rPr>
+              <a:t>观察</a:t>
+            </a:r>
+          </a:p>
+          <a:p>
+            <a:pPr algn="ctr"/>
+            <a:r>
+              <a:rPr sz="1500">
+                <a:solidFill>
+                  <a:srgbClr val="202020"/>
+                </a:solidFill>
+                <a:latin typeface="Microsoft YaHei"/>
+              </a:rPr>
+              <a:t>读取环境与相遇</a:t>
+            </a:r>
+          </a:p>
+        </p:txBody>
+      </p:sp>
       <p:cxnSp>
         <p:nvCxnSpPr>
-          <p:cNvPr id="19" name="直接连接符 18"/>
+          <p:cNvPr id="7" name="Connector 6"/>
           <p:cNvCxnSpPr/>
           <p:nvPr/>
         </p:nvCxnSpPr>
         <p:spPr>
           <a:xfrm>
-            <a:off x="137584" y="897467"/>
-            <a:ext cx="11616267" cy="0"/>
+            <a:off x="2286000" y="2331720"/>
+            <a:ext cx="1371600" cy="0"/>
           </a:xfrm>
           <a:prstGeom prst="line">
             <a:avLst/>
           </a:prstGeom>
-          <a:ln w="34925" cmpd="sng">
+          <a:ln w="17780">
             <a:solidFill>
-              <a:schemeClr val="accent6"/>
+              <a:srgbClr val="C00000"/>
             </a:solidFill>
           </a:ln>
+          <a:effectLst/>
         </p:spPr>
         <p:style>
-          <a:lnRef idx="1">
+          <a:lnRef idx="2">
             <a:schemeClr val="accent1"/>
           </a:lnRef>
           <a:fillRef idx="0">
             <a:schemeClr val="accent1"/>
           </a:fillRef>
-          <a:effectRef idx="0">
+          <a:effectRef idx="1">
             <a:schemeClr val="accent1"/>
           </a:effectRef>
           <a:fontRef idx="minor">
@@ -8960,155 +10002,86 @@
       </p:cxnSp>
       <p:sp>
         <p:nvSpPr>
-          <p:cNvPr id="3076" name="AutoShape 2" descr="http://img1.gtimg.com/rushidao/pics/hv1/229/47/1914/124470064.jpg"/>
-          <p:cNvSpPr>
-            <a:spLocks noChangeAspect="1"/>
-          </p:cNvSpPr>
-          <p:nvPr/>
-        </p:nvSpPr>
-        <p:spPr>
-          <a:xfrm>
-            <a:off x="207433" y="-192616"/>
-            <a:ext cx="406400" cy="406400"/>
-          </a:xfrm>
-          <a:prstGeom prst="rect">
-            <a:avLst/>
-          </a:prstGeom>
-          <a:noFill/>
-          <a:ln w="9525">
-            <a:noFill/>
+          <p:cNvPr id="8" name="Rounded Rectangle 7"/>
+          <p:cNvSpPr/>
+          <p:nvPr/>
+        </p:nvSpPr>
+        <p:spPr>
+          <a:xfrm>
+            <a:off x="3657600" y="1856231"/>
+            <a:ext cx="1920240" cy="960120"/>
+          </a:xfrm>
+          <a:prstGeom prst="roundRect">
+            <a:avLst/>
+          </a:prstGeom>
+          <a:solidFill>
+            <a:srgbClr val="F8F8F8"/>
+          </a:solidFill>
+          <a:ln w="17780">
+            <a:solidFill>
+              <a:srgbClr val="C00000"/>
+            </a:solidFill>
           </a:ln>
-        </p:spPr>
-        <p:txBody>
-          <a:bodyPr/>
-          <a:p>
-            <a:pPr eaLnBrk="1" hangingPunct="1"/>
-            <a:endParaRPr lang="zh-CN" altLang="en-US" sz="2400" dirty="0">
-              <a:latin typeface="Arial" panose="020B0604020202090204" pitchFamily="34" charset="0"/>
-            </a:endParaRPr>
-          </a:p>
-        </p:txBody>
-      </p:sp>
-      <p:sp>
-        <p:nvSpPr>
-          <p:cNvPr id="2" name="文本框 1"/>
-          <p:cNvSpPr txBox="1"/>
-          <p:nvPr/>
-        </p:nvSpPr>
-        <p:spPr>
-          <a:xfrm>
-            <a:off x="343535" y="1112520"/>
-            <a:ext cx="5334635" cy="521970"/>
-          </a:xfrm>
-          <a:prstGeom prst="rect">
-            <a:avLst/>
-          </a:prstGeom>
-          <a:noFill/>
-        </p:spPr>
-        <p:txBody>
-          <a:bodyPr wrap="square" rtlCol="0" anchor="t">
-            <a:spAutoFit/>
-          </a:bodyPr>
-          <a:lstStyle/>
-          <a:p>
-            <a:r>
-              <a:t>复现机制总览</a:t>
-            </a:r>
-          </a:p>
-        </p:txBody>
-      </p:sp>
-      <p:sp>
-        <p:nvSpPr>
-          <p:cNvPr id="5" name="标题 1"/>
-          <p:cNvSpPr txBox="1"/>
-          <p:nvPr>
-            <p:custDataLst>
-              <p:tags r:id="rId1"/>
-            </p:custDataLst>
-          </p:nvPr>
-        </p:nvSpPr>
-        <p:spPr>
-          <a:xfrm>
-            <a:off x="463137" y="174094"/>
-            <a:ext cx="11409315" cy="736490"/>
-          </a:xfrm>
-          <a:prstGeom prst="rect">
-            <a:avLst/>
-          </a:prstGeom>
-        </p:spPr>
-        <p:txBody>
-          <a:bodyPr>
-            <a:noAutofit/>
-          </a:bodyPr>
-          <a:lstStyle>
-            <a:lvl1pPr algn="l" defTabSz="914400" rtl="0" eaLnBrk="1" latinLnBrk="0" hangingPunct="1">
-              <a:lnSpc>
-                <a:spcPct val="90000"/>
-              </a:lnSpc>
-              <a:spcBef>
-                <a:spcPct val="0"/>
-              </a:spcBef>
-              <a:buNone/>
-              <a:defRPr sz="4400" kern="1200">
-                <a:solidFill>
-                  <a:schemeClr val="tx1"/>
-                </a:solidFill>
-                <a:latin typeface="+mj-lt"/>
-                <a:ea typeface="+mj-ea"/>
-                <a:cs typeface="+mj-cs"/>
-              </a:defRPr>
-            </a:lvl1pPr>
-          </a:lstStyle>
-          <a:p>
-            <a:r>
-              <a:t>论文复现补充</a:t>
-            </a:r>
-          </a:p>
-        </p:txBody>
-      </p:sp>
-      <p:sp>
-        <p:nvSpPr>
-          <p:cNvPr id="3" name="文本框 2"/>
-          <p:cNvSpPr txBox="1"/>
-          <p:nvPr/>
-        </p:nvSpPr>
-        <p:spPr>
-          <a:xfrm>
-            <a:off x="462915" y="2960370"/>
-            <a:ext cx="5334635" cy="521970"/>
-          </a:xfrm>
-          <a:prstGeom prst="rect">
-            <a:avLst/>
-          </a:prstGeom>
-          <a:noFill/>
-        </p:spPr>
-        <p:txBody>
-          <a:bodyPr wrap="square" rtlCol="0" anchor="t">
-            <a:spAutoFit/>
-          </a:bodyPr>
-          <a:lstStyle/>
-          <a:p>
-            <a:r>
-              <a:t>核心闭环</a:t>
+          <a:effectLst/>
+        </p:spPr>
+        <p:style>
+          <a:lnRef idx="1">
+            <a:schemeClr val="accent1"/>
+          </a:lnRef>
+          <a:fillRef idx="3">
+            <a:schemeClr val="accent1"/>
+          </a:fillRef>
+          <a:effectRef idx="2">
+            <a:schemeClr val="accent1"/>
+          </a:effectRef>
+          <a:fontRef idx="minor">
+            <a:schemeClr val="lt1"/>
+          </a:fontRef>
+        </p:style>
+        <p:txBody>
+          <a:bodyPr rtlCol="0" anchor="ctr" lIns="118872" rIns="118872" tIns="109728"/>
+          <a:lstStyle/>
+          <a:p>
+            <a:pPr algn="ctr"/>
+            <a:r>
+              <a:rPr sz="1700" b="1">
+                <a:solidFill>
+                  <a:srgbClr val="202020"/>
+                </a:solidFill>
+                <a:latin typeface="Microsoft YaHei"/>
+              </a:rPr>
+              <a:t>记忆</a:t>
+            </a:r>
+          </a:p>
+          <a:p>
+            <a:pPr algn="ctr"/>
+            <a:r>
+              <a:rPr sz="1500">
+                <a:solidFill>
+                  <a:srgbClr val="202020"/>
+                </a:solidFill>
+                <a:latin typeface="Microsoft YaHei"/>
+              </a:rPr>
+              <a:t>写入经历</a:t>
             </a:r>
           </a:p>
         </p:txBody>
       </p:sp>
       <p:cxnSp>
         <p:nvCxnSpPr>
-          <p:cNvPr id="14" name="Connector 4"/>
+          <p:cNvPr id="9" name="Connector 8"/>
           <p:cNvCxnSpPr/>
           <p:nvPr/>
         </p:nvCxnSpPr>
         <p:spPr>
           <a:xfrm>
-            <a:off x="1965960" y="2148840"/>
-            <a:ext cx="1874520" cy="0"/>
+            <a:off x="5577840" y="2331720"/>
+            <a:ext cx="1600200" cy="0"/>
           </a:xfrm>
           <a:prstGeom prst="line">
             <a:avLst/>
           </a:prstGeom>
-          <a:ln w="21590">
+          <a:ln w="17780">
             <a:solidFill>
               <a:srgbClr val="C00000"/>
             </a:solidFill>
@@ -9130,21 +10103,88 @@
           </a:fontRef>
         </p:style>
       </p:cxnSp>
+      <p:sp>
+        <p:nvSpPr>
+          <p:cNvPr id="10" name="Rounded Rectangle 9"/>
+          <p:cNvSpPr/>
+          <p:nvPr/>
+        </p:nvSpPr>
+        <p:spPr>
+          <a:xfrm>
+            <a:off x="7178040" y="1856231"/>
+            <a:ext cx="1965960" cy="960120"/>
+          </a:xfrm>
+          <a:prstGeom prst="roundRect">
+            <a:avLst/>
+          </a:prstGeom>
+          <a:solidFill>
+            <a:srgbClr val="F8F8F8"/>
+          </a:solidFill>
+          <a:ln w="17780">
+            <a:solidFill>
+              <a:srgbClr val="C00000"/>
+            </a:solidFill>
+          </a:ln>
+          <a:effectLst/>
+        </p:spPr>
+        <p:style>
+          <a:lnRef idx="1">
+            <a:schemeClr val="accent1"/>
+          </a:lnRef>
+          <a:fillRef idx="3">
+            <a:schemeClr val="accent1"/>
+          </a:fillRef>
+          <a:effectRef idx="2">
+            <a:schemeClr val="accent1"/>
+          </a:effectRef>
+          <a:fontRef idx="minor">
+            <a:schemeClr val="lt1"/>
+          </a:fontRef>
+        </p:style>
+        <p:txBody>
+          <a:bodyPr rtlCol="0" anchor="ctr" lIns="118872" rIns="118872" tIns="109728"/>
+          <a:lstStyle/>
+          <a:p>
+            <a:pPr algn="ctr"/>
+            <a:r>
+              <a:rPr sz="1700" b="1">
+                <a:solidFill>
+                  <a:srgbClr val="202020"/>
+                </a:solidFill>
+                <a:latin typeface="Microsoft YaHei"/>
+              </a:rPr>
+              <a:t>检索</a:t>
+            </a:r>
+          </a:p>
+          <a:p>
+            <a:pPr algn="ctr"/>
+            <a:r>
+              <a:rPr sz="1500">
+                <a:solidFill>
+                  <a:srgbClr val="202020"/>
+                </a:solidFill>
+                <a:latin typeface="Microsoft YaHei"/>
+              </a:rPr>
+              <a:t>召回相关记忆</a:t>
+            </a:r>
+          </a:p>
+        </p:txBody>
+      </p:sp>
       <p:cxnSp>
         <p:nvCxnSpPr>
-          <p:cNvPr id="15" name="Connector 5"/>
+          <p:cNvPr id="11" name="Connector 10"/>
           <p:cNvCxnSpPr/>
           <p:nvPr/>
         </p:nvCxnSpPr>
         <p:spPr>
           <a:xfrm>
-            <a:off x="5532120" y="2148840"/>
-            <a:ext cx="1874520" cy="0"/>
+            <a:off x="9144000" y="2331720"/>
+            <a:ext cx="914400" cy="0"/>
           </a:xfrm>
           <a:prstGeom prst="line">
             <a:avLst/>
           </a:prstGeom>
-          <a:ln w="21590">
+          <a:ln w="17780">
             <a:solidFill>
               <a:srgbClr val="C00000"/>
             </a:solidFill>
@@ -9166,21 +10206,24 @@
           </a:fontRef>
         </p:style>
       </p:cxnSp>
-      <p:cxnSp>
-        <p:nvCxnSpPr>
-          <p:cNvPr id="16" name="Connector 6"/>
-          <p:cNvCxnSpPr/>
-          <p:nvPr/>
-        </p:nvCxnSpPr>
-        <p:spPr>
-          <a:xfrm>
-            <a:off x="9098280" y="2148840"/>
-            <a:ext cx="1234440" cy="0"/>
-          </a:xfrm>
-          <a:prstGeom prst="line">
-            <a:avLst/>
-          </a:prstGeom>
-          <a:ln w="21590">
+      <p:sp>
+        <p:nvSpPr>
+          <p:cNvPr id="12" name="Rounded Rectangle 11"/>
+          <p:cNvSpPr/>
+          <p:nvPr/>
+        </p:nvSpPr>
+        <p:spPr>
+          <a:xfrm>
+            <a:off x="10058400" y="1856231"/>
+            <a:ext cx="1664208" cy="960120"/>
+          </a:xfrm>
+          <a:prstGeom prst="roundRect">
+            <a:avLst/>
+          </a:prstGeom>
+          <a:solidFill>
+            <a:srgbClr val="F8F8F8"/>
+          </a:solidFill>
+          <a:ln w="17780">
             <a:solidFill>
               <a:srgbClr val="C00000"/>
             </a:solidFill>
@@ -9188,45 +10231,6 @@
           <a:effectLst/>
         </p:spPr>
         <p:style>
-          <a:lnRef idx="2">
-            <a:schemeClr val="accent1"/>
-          </a:lnRef>
-          <a:fillRef idx="0">
-            <a:schemeClr val="accent1"/>
-          </a:fillRef>
-          <a:effectRef idx="1">
-            <a:schemeClr val="accent1"/>
-          </a:effectRef>
-          <a:fontRef idx="minor">
-            <a:schemeClr val="tx1"/>
-          </a:fontRef>
-        </p:style>
-      </p:cxnSp>
-      <p:sp>
-        <p:nvSpPr>
-          <p:cNvPr id="17" name="Rounded Rectangle 7"/>
-          <p:cNvSpPr/>
-          <p:nvPr/>
-        </p:nvSpPr>
-        <p:spPr>
-          <a:xfrm>
-            <a:off x="685800" y="1664208"/>
-            <a:ext cx="1554480" cy="969264"/>
-          </a:xfrm>
-          <a:prstGeom prst="roundRect">
-            <a:avLst/>
-          </a:prstGeom>
-          <a:solidFill>
-            <a:srgbClr val="F5F5F5"/>
-          </a:solidFill>
-          <a:ln w="15240">
-            <a:solidFill>
-              <a:srgbClr val="C00000"/>
-            </a:solidFill>
-          </a:ln>
-          <a:effectLst/>
-        </p:spPr>
-        <p:style>
           <a:lnRef idx="1">
             <a:schemeClr val="accent1"/>
           </a:lnRef>
@@ -9241,40 +10245,54 @@
           </a:fontRef>
         </p:style>
         <p:txBody>
-          <a:bodyPr wrap="square" lIns="73152" rIns="73152" rtlCol="0" anchor="ctr"/>
-          <a:lstStyle/>
-          <a:p>
-            <a:r>
-              <a:t>观察</a:t>
-            </a:r>
-          </a:p>
-          <a:p>
-            <a:r>
-              <a:t>读取环境与相遇</a:t>
-            </a:r>
-          </a:p>
-        </p:txBody>
-      </p:sp>
-      <p:sp>
-        <p:nvSpPr>
-          <p:cNvPr id="18" name="Rounded Rectangle 8"/>
+          <a:bodyPr rtlCol="0" anchor="ctr" lIns="118872" rIns="118872" tIns="109728"/>
+          <a:lstStyle/>
+          <a:p>
+            <a:pPr algn="ctr"/>
+            <a:r>
+              <a:rPr sz="1700" b="1">
+                <a:solidFill>
+                  <a:srgbClr val="202020"/>
+                </a:solidFill>
+                <a:latin typeface="Microsoft YaHei"/>
+              </a:rPr>
+              <a:t>反思</a:t>
+            </a:r>
+          </a:p>
+          <a:p>
+            <a:pPr algn="ctr"/>
+            <a:r>
+              <a:rPr sz="1500">
+                <a:solidFill>
+                  <a:srgbClr val="202020"/>
+                </a:solidFill>
+                <a:latin typeface="Microsoft YaHei"/>
+              </a:rPr>
+              <a:t>形成高层认知</a:t>
+            </a:r>
+          </a:p>
+        </p:txBody>
+      </p:sp>
+      <p:sp>
+        <p:nvSpPr>
+          <p:cNvPr id="13" name="Rectangle 12"/>
           <p:cNvSpPr/>
           <p:nvPr/>
         </p:nvSpPr>
         <p:spPr>
           <a:xfrm>
-            <a:off x="3657600" y="1664208"/>
-            <a:ext cx="1920240" cy="969264"/>
-          </a:xfrm>
-          <a:prstGeom prst="roundRect">
+            <a:off x="457200" y="3383280"/>
+            <a:ext cx="146304" cy="146304"/>
+          </a:xfrm>
+          <a:prstGeom prst="rect">
             <a:avLst/>
           </a:prstGeom>
           <a:solidFill>
-            <a:srgbClr val="F5F5F5"/>
+            <a:srgbClr val="1C4491"/>
           </a:solidFill>
-          <a:ln w="15240">
+          <a:ln>
             <a:solidFill>
-              <a:srgbClr val="C00000"/>
+              <a:srgbClr val="1C4491"/>
             </a:solidFill>
           </a:ln>
           <a:effectLst/>
@@ -9294,40 +10312,173 @@
           </a:fontRef>
         </p:style>
         <p:txBody>
-          <a:bodyPr wrap="square" lIns="73152" rIns="73152" rtlCol="0" anchor="ctr"/>
-          <a:lstStyle/>
-          <a:p>
-            <a:r>
-              <a:t>记忆</a:t>
-            </a:r>
-          </a:p>
-          <a:p>
-            <a:r>
-              <a:t>写入经历</a:t>
-            </a:r>
-          </a:p>
-        </p:txBody>
-      </p:sp>
-      <p:sp>
-        <p:nvSpPr>
-          <p:cNvPr id="20" name="Rounded Rectangle 9"/>
+          <a:bodyPr rtlCol="0" anchor="ctr"/>
+          <a:lstStyle/>
+          <a:p>
+            <a:pPr algn="ctr"/>
+          </a:p>
+        </p:txBody>
+      </p:sp>
+      <p:sp>
+        <p:nvSpPr>
+          <p:cNvPr id="14" name="TextBox 13"/>
+          <p:cNvSpPr txBox="1"/>
+          <p:nvPr/>
+        </p:nvSpPr>
+        <p:spPr>
+          <a:xfrm>
+            <a:off x="749808" y="3291840"/>
+            <a:ext cx="5212080" cy="438912"/>
+          </a:xfrm>
+          <a:prstGeom prst="rect">
+            <a:avLst/>
+          </a:prstGeom>
+          <a:noFill/>
+          <a:effectLst/>
+        </p:spPr>
+        <p:txBody>
+          <a:bodyPr wrap="none" lIns="0" rIns="0" tIns="0" bIns="0">
+            <a:spAutoFit/>
+          </a:bodyPr>
+          <a:lstStyle/>
+          <a:p>
+            <a:r>
+              <a:rPr sz="2400" b="1">
+                <a:solidFill>
+                  <a:srgbClr val="C00000"/>
+                </a:solidFill>
+                <a:latin typeface="Microsoft YaHei"/>
+              </a:rPr>
+              <a:t>说明</a:t>
+            </a:r>
+          </a:p>
+        </p:txBody>
+      </p:sp>
+      <p:sp>
+        <p:nvSpPr>
+          <p:cNvPr id="15" name="TextBox 14"/>
+          <p:cNvSpPr txBox="1"/>
+          <p:nvPr/>
+        </p:nvSpPr>
+        <p:spPr>
+          <a:xfrm>
+            <a:off x="749808" y="3822191"/>
+            <a:ext cx="5394960" cy="274320"/>
+          </a:xfrm>
+          <a:prstGeom prst="rect">
+            <a:avLst/>
+          </a:prstGeom>
+          <a:noFill/>
+          <a:effectLst/>
+        </p:spPr>
+        <p:txBody>
+          <a:bodyPr wrap="none" lIns="0" rIns="0" tIns="0" bIns="0">
+            <a:spAutoFit/>
+          </a:bodyPr>
+          <a:lstStyle/>
+          <a:p>
+            <a:r>
+              <a:rPr sz="1500" b="0">
+                <a:solidFill>
+                  <a:srgbClr val="202020"/>
+                </a:solidFill>
+                <a:latin typeface="Microsoft YaHei"/>
+              </a:rPr>
+              <a:t>环境感知 -&gt; 记忆检索 -&gt; 计划驱动 -&gt; 行动/对话</a:t>
+            </a:r>
+          </a:p>
+        </p:txBody>
+      </p:sp>
+      <p:sp>
+        <p:nvSpPr>
+          <p:cNvPr id="16" name="TextBox 15"/>
+          <p:cNvSpPr txBox="1"/>
+          <p:nvPr/>
+        </p:nvSpPr>
+        <p:spPr>
+          <a:xfrm>
+            <a:off x="749808" y="4142231"/>
+            <a:ext cx="5394960" cy="274320"/>
+          </a:xfrm>
+          <a:prstGeom prst="rect">
+            <a:avLst/>
+          </a:prstGeom>
+          <a:noFill/>
+          <a:effectLst/>
+        </p:spPr>
+        <p:txBody>
+          <a:bodyPr wrap="none" lIns="0" rIns="0" tIns="0" bIns="0">
+            <a:spAutoFit/>
+          </a:bodyPr>
+          <a:lstStyle/>
+          <a:p>
+            <a:r>
+              <a:rPr sz="1500" b="0">
+                <a:solidFill>
+                  <a:srgbClr val="202020"/>
+                </a:solidFill>
+                <a:latin typeface="Microsoft YaHei"/>
+              </a:rPr>
+              <a:t>记忆更新 -&gt; 反思形成</a:t>
+            </a:r>
+          </a:p>
+        </p:txBody>
+      </p:sp>
+      <p:sp>
+        <p:nvSpPr>
+          <p:cNvPr id="17" name="TextBox 16"/>
+          <p:cNvSpPr txBox="1"/>
+          <p:nvPr/>
+        </p:nvSpPr>
+        <p:spPr>
+          <a:xfrm>
+            <a:off x="749808" y="4462272"/>
+            <a:ext cx="5394960" cy="274320"/>
+          </a:xfrm>
+          <a:prstGeom prst="rect">
+            <a:avLst/>
+          </a:prstGeom>
+          <a:noFill/>
+          <a:effectLst/>
+        </p:spPr>
+        <p:txBody>
+          <a:bodyPr wrap="none" lIns="0" rIns="0" tIns="0" bIns="0">
+            <a:spAutoFit/>
+          </a:bodyPr>
+          <a:lstStyle/>
+          <a:p>
+            <a:r>
+              <a:rPr sz="1500" b="0">
+                <a:solidFill>
+                  <a:srgbClr val="202020"/>
+                </a:solidFill>
+                <a:latin typeface="Microsoft YaHei"/>
+              </a:rPr>
+              <a:t>本项目保留论文中最核心的生成式智能体闭环。</a:t>
+            </a:r>
+          </a:p>
+        </p:txBody>
+      </p:sp>
+      <p:sp>
+        <p:nvSpPr>
+          <p:cNvPr id="18" name="Rounded Rectangle 17"/>
           <p:cNvSpPr/>
           <p:nvPr/>
         </p:nvSpPr>
         <p:spPr>
           <a:xfrm>
-            <a:off x="7205472" y="1664208"/>
-            <a:ext cx="1965960" cy="969264"/>
+            <a:off x="6720840" y="3822191"/>
+            <a:ext cx="4892040" cy="1572768"/>
           </a:xfrm>
           <a:prstGeom prst="roundRect">
             <a:avLst/>
           </a:prstGeom>
           <a:solidFill>
-            <a:srgbClr val="F5F5F5"/>
+            <a:srgbClr val="202020"/>
           </a:solidFill>
-          <a:ln w="15240">
+          <a:ln>
             <a:solidFill>
-              <a:srgbClr val="C00000"/>
+              <a:srgbClr val="202020"/>
             </a:solidFill>
           </a:ln>
           <a:effectLst/>
@@ -9347,122 +10498,51 @@
           </a:fontRef>
         </p:style>
         <p:txBody>
-          <a:bodyPr wrap="square" lIns="73152" rIns="73152" rtlCol="0" anchor="ctr"/>
-          <a:lstStyle/>
-          <a:p>
-            <a:r>
-              <a:t>检索</a:t>
-            </a:r>
-          </a:p>
-          <a:p>
-            <a:r>
-              <a:t>召回相关记忆</a:t>
-            </a:r>
-          </a:p>
-        </p:txBody>
-      </p:sp>
-      <p:sp>
-        <p:nvSpPr>
-          <p:cNvPr id="21" name="Rounded Rectangle 10"/>
-          <p:cNvSpPr/>
-          <p:nvPr/>
-        </p:nvSpPr>
-        <p:spPr>
-          <a:xfrm>
-            <a:off x="10131552" y="1664208"/>
-            <a:ext cx="1600200" cy="969264"/>
-          </a:xfrm>
-          <a:prstGeom prst="roundRect">
-            <a:avLst/>
-          </a:prstGeom>
-          <a:solidFill>
-            <a:srgbClr val="F5F5F5"/>
-          </a:solidFill>
-          <a:ln w="15240">
-            <a:solidFill>
-              <a:srgbClr val="C00000"/>
-            </a:solidFill>
-          </a:ln>
-          <a:effectLst/>
-        </p:spPr>
-        <p:style>
-          <a:lnRef idx="1">
-            <a:schemeClr val="accent1"/>
-          </a:lnRef>
-          <a:fillRef idx="3">
-            <a:schemeClr val="accent1"/>
-          </a:fillRef>
-          <a:effectRef idx="2">
-            <a:schemeClr val="accent1"/>
-          </a:effectRef>
-          <a:fontRef idx="minor">
-            <a:schemeClr val="lt1"/>
-          </a:fontRef>
-        </p:style>
-        <p:txBody>
-          <a:bodyPr wrap="square" lIns="73152" rIns="73152" rtlCol="0" anchor="ctr"/>
-          <a:lstStyle/>
-          <a:p>
-            <a:r>
-              <a:t>反思</a:t>
-            </a:r>
-          </a:p>
-          <a:p>
-            <a:r>
-              <a:t>形成高层认知</a:t>
-            </a:r>
-          </a:p>
-        </p:txBody>
-      </p:sp>
-      <p:sp>
-        <p:nvSpPr>
-          <p:cNvPr id="22" name="Rounded Rectangle 13"/>
-          <p:cNvSpPr/>
-          <p:nvPr/>
-        </p:nvSpPr>
-        <p:spPr>
-          <a:xfrm>
-            <a:off x="7062470" y="3753612"/>
-            <a:ext cx="4343400" cy="1600200"/>
-          </a:xfrm>
-          <a:prstGeom prst="roundRect">
-            <a:avLst/>
-          </a:prstGeom>
-          <a:solidFill>
-            <a:srgbClr val="232323"/>
-          </a:solidFill>
-          <a:ln>
-            <a:solidFill>
-              <a:srgbClr val="232323"/>
-            </a:solidFill>
-          </a:ln>
-          <a:effectLst/>
-        </p:spPr>
-        <p:style>
-          <a:lnRef idx="1">
-            <a:schemeClr val="accent1"/>
-          </a:lnRef>
-          <a:fillRef idx="3">
-            <a:schemeClr val="accent1"/>
-          </a:fillRef>
-          <a:effectRef idx="2">
-            <a:schemeClr val="accent1"/>
-          </a:effectRef>
-          <a:fontRef idx="minor">
-            <a:schemeClr val="lt1"/>
-          </a:fontRef>
-        </p:style>
-        <p:txBody>
-          <a:bodyPr wrap="none" lIns="109728" tIns="91440" rIns="73152" bIns="73152" rtlCol="0" anchor="ctr"/>
-          <a:lstStyle/>
-          <a:p>
-            <a:r>
-              <a:t>环境感知 -&gt; 记忆检索 -&gt; 计划驱动 -&gt; 行动/对话 -&gt; 记忆更新 -&gt; 反思形成</a:t>
-            </a:r>
-          </a:p>
-          <a:p>
-            <a:r>
-              <a:t>本项目保留论文中最核心的认知闭环，角色行为由计划、位置、记忆和相遇共同驱动。</a:t>
+          <a:bodyPr rtlCol="0" anchor="ctr" lIns="201168" rIns="201168" tIns="146304"/>
+          <a:lstStyle/>
+          <a:p>
+            <a:pPr algn="ctr"/>
+            <a:r>
+              <a:rPr sz="1500" b="1">
+                <a:solidFill>
+                  <a:srgbClr val="FFFFFF"/>
+                </a:solidFill>
+                <a:latin typeface="Microsoft YaHei"/>
+              </a:rPr>
+              <a:t>复现机制总览</a:t>
+            </a:r>
+          </a:p>
+          <a:p>
+            <a:r>
+              <a:rPr sz="1200">
+                <a:solidFill>
+                  <a:srgbClr val="FFFFFF"/>
+                </a:solidFill>
+                <a:latin typeface="Microsoft YaHei"/>
+              </a:rPr>
+              <a:t>环境感知 -&gt; 记忆检索 -&gt; 计划驱动 -&gt; 行动/对话</a:t>
+            </a:r>
+          </a:p>
+          <a:p>
+            <a:r>
+              <a:rPr sz="1200">
+                <a:solidFill>
+                  <a:srgbClr val="FFFFFF"/>
+                </a:solidFill>
+                <a:latin typeface="Microsoft YaHei"/>
+              </a:rPr>
+              <a:t>记忆更新 -&gt; 反思形成</a:t>
+            </a:r>
+          </a:p>
+          <a:p>
+            <a:r>
+              <a:rPr sz="1200">
+                <a:solidFill>
+                  <a:srgbClr val="FFFFFF"/>
+                </a:solidFill>
+                <a:latin typeface="Microsoft YaHei"/>
+              </a:rPr>
+              <a:t>本项目保留论文中最核心的生成式智能体闭环。</a:t>
             </a:r>
           </a:p>
         </p:txBody>
@@ -9478,12 +10558,6 @@
 <file path=ppt/slides/slide9.xml><?xml version="1.0" encoding="utf-8"?>
 <p:sld xmlns:a="http://schemas.openxmlformats.org/drawingml/2006/main" xmlns:p="http://schemas.openxmlformats.org/presentationml/2006/main" xmlns:r="http://schemas.openxmlformats.org/officeDocument/2006/relationships">
   <p:cSld>
-    <p:bg>
-      <p:bgPr>
-        <a:noFill/>
-        <a:effectLst/>
-      </p:bgPr>
-    </p:bg>
     <p:spTree>
       <p:nvGrpSpPr>
         <p:cNvPr id="1" name=""/>
@@ -9491,34 +10565,264 @@
         <p:nvPr/>
       </p:nvGrpSpPr>
       <p:grpSpPr/>
+      <p:sp>
+        <p:nvSpPr>
+          <p:cNvPr id="2" name="TextBox 1"/>
+          <p:cNvSpPr txBox="1"/>
+          <p:nvPr/>
+        </p:nvSpPr>
+        <p:spPr>
+          <a:xfrm>
+            <a:off x="566928" y="201168"/>
+            <a:ext cx="6583680" cy="658368"/>
+          </a:xfrm>
+          <a:prstGeom prst="rect">
+            <a:avLst/>
+          </a:prstGeom>
+          <a:noFill/>
+          <a:effectLst/>
+        </p:spPr>
+        <p:txBody>
+          <a:bodyPr wrap="none" lIns="0" rIns="0" tIns="0" bIns="0">
+            <a:spAutoFit/>
+          </a:bodyPr>
+          <a:lstStyle/>
+          <a:p>
+            <a:r>
+              <a:rPr sz="3400" b="1">
+                <a:solidFill>
+                  <a:srgbClr val="C00000"/>
+                </a:solidFill>
+                <a:latin typeface="SimHei"/>
+              </a:rPr>
+              <a:t>双模式设计</a:t>
+            </a:r>
+          </a:p>
+        </p:txBody>
+      </p:sp>
+      <p:sp>
+        <p:nvSpPr>
+          <p:cNvPr id="3" name="Rectangle 2"/>
+          <p:cNvSpPr/>
+          <p:nvPr/>
+        </p:nvSpPr>
+        <p:spPr>
+          <a:xfrm>
+            <a:off x="137160" y="987552"/>
+            <a:ext cx="11887200" cy="36576"/>
+          </a:xfrm>
+          <a:prstGeom prst="rect">
+            <a:avLst/>
+          </a:prstGeom>
+          <a:solidFill>
+            <a:srgbClr val="EB4C60"/>
+          </a:solidFill>
+          <a:ln>
+            <a:solidFill>
+              <a:srgbClr val="EB4C60"/>
+            </a:solidFill>
+          </a:ln>
+          <a:effectLst/>
+        </p:spPr>
+        <p:style>
+          <a:lnRef idx="1">
+            <a:schemeClr val="accent1"/>
+          </a:lnRef>
+          <a:fillRef idx="3">
+            <a:schemeClr val="accent1"/>
+          </a:fillRef>
+          <a:effectRef idx="2">
+            <a:schemeClr val="accent1"/>
+          </a:effectRef>
+          <a:fontRef idx="minor">
+            <a:schemeClr val="lt1"/>
+          </a:fontRef>
+        </p:style>
+        <p:txBody>
+          <a:bodyPr rtlCol="0" anchor="ctr"/>
+          <a:lstStyle/>
+          <a:p>
+            <a:pPr algn="ctr"/>
+          </a:p>
+        </p:txBody>
+      </p:sp>
+      <p:sp>
+        <p:nvSpPr>
+          <p:cNvPr id="4" name="Rectangle 3"/>
+          <p:cNvSpPr/>
+          <p:nvPr/>
+        </p:nvSpPr>
+        <p:spPr>
+          <a:xfrm>
+            <a:off x="457200" y="1426464"/>
+            <a:ext cx="146304" cy="146304"/>
+          </a:xfrm>
+          <a:prstGeom prst="rect">
+            <a:avLst/>
+          </a:prstGeom>
+          <a:solidFill>
+            <a:srgbClr val="1C4491"/>
+          </a:solidFill>
+          <a:ln>
+            <a:solidFill>
+              <a:srgbClr val="1C4491"/>
+            </a:solidFill>
+          </a:ln>
+          <a:effectLst/>
+        </p:spPr>
+        <p:style>
+          <a:lnRef idx="1">
+            <a:schemeClr val="accent1"/>
+          </a:lnRef>
+          <a:fillRef idx="3">
+            <a:schemeClr val="accent1"/>
+          </a:fillRef>
+          <a:effectRef idx="2">
+            <a:schemeClr val="accent1"/>
+          </a:effectRef>
+          <a:fontRef idx="minor">
+            <a:schemeClr val="lt1"/>
+          </a:fontRef>
+        </p:style>
+        <p:txBody>
+          <a:bodyPr rtlCol="0" anchor="ctr"/>
+          <a:lstStyle/>
+          <a:p>
+            <a:pPr algn="ctr"/>
+          </a:p>
+        </p:txBody>
+      </p:sp>
+      <p:sp>
+        <p:nvSpPr>
+          <p:cNvPr id="5" name="TextBox 4"/>
+          <p:cNvSpPr txBox="1"/>
+          <p:nvPr/>
+        </p:nvSpPr>
+        <p:spPr>
+          <a:xfrm>
+            <a:off x="749808" y="1335024"/>
+            <a:ext cx="5212080" cy="438912"/>
+          </a:xfrm>
+          <a:prstGeom prst="rect">
+            <a:avLst/>
+          </a:prstGeom>
+          <a:noFill/>
+          <a:effectLst/>
+        </p:spPr>
+        <p:txBody>
+          <a:bodyPr wrap="none" lIns="0" rIns="0" tIns="0" bIns="0">
+            <a:spAutoFit/>
+          </a:bodyPr>
+          <a:lstStyle/>
+          <a:p>
+            <a:r>
+              <a:rPr sz="2400" b="1">
+                <a:solidFill>
+                  <a:srgbClr val="C00000"/>
+                </a:solidFill>
+                <a:latin typeface="Microsoft YaHei"/>
+              </a:rPr>
+              <a:t>规则演示与 LLM 增强</a:t>
+            </a:r>
+          </a:p>
+        </p:txBody>
+      </p:sp>
+      <p:sp>
+        <p:nvSpPr>
+          <p:cNvPr id="6" name="Rounded Rectangle 5"/>
+          <p:cNvSpPr/>
+          <p:nvPr/>
+        </p:nvSpPr>
+        <p:spPr>
+          <a:xfrm>
+            <a:off x="685800" y="1856231"/>
+            <a:ext cx="1600200" cy="960120"/>
+          </a:xfrm>
+          <a:prstGeom prst="roundRect">
+            <a:avLst/>
+          </a:prstGeom>
+          <a:solidFill>
+            <a:srgbClr val="F8F8F8"/>
+          </a:solidFill>
+          <a:ln w="17780">
+            <a:solidFill>
+              <a:srgbClr val="C00000"/>
+            </a:solidFill>
+          </a:ln>
+          <a:effectLst/>
+        </p:spPr>
+        <p:style>
+          <a:lnRef idx="1">
+            <a:schemeClr val="accent1"/>
+          </a:lnRef>
+          <a:fillRef idx="3">
+            <a:schemeClr val="accent1"/>
+          </a:fillRef>
+          <a:effectRef idx="2">
+            <a:schemeClr val="accent1"/>
+          </a:effectRef>
+          <a:fontRef idx="minor">
+            <a:schemeClr val="lt1"/>
+          </a:fontRef>
+        </p:style>
+        <p:txBody>
+          <a:bodyPr rtlCol="0" anchor="ctr" lIns="118872" rIns="118872" tIns="109728"/>
+          <a:lstStyle/>
+          <a:p>
+            <a:pPr algn="ctr"/>
+            <a:r>
+              <a:rPr sz="1700" b="1">
+                <a:solidFill>
+                  <a:srgbClr val="202020"/>
+                </a:solidFill>
+                <a:latin typeface="Microsoft YaHei"/>
+              </a:rPr>
+              <a:t>规则模式</a:t>
+            </a:r>
+          </a:p>
+          <a:p>
+            <a:pPr algn="ctr"/>
+            <a:r>
+              <a:rPr sz="1500">
+                <a:solidFill>
+                  <a:srgbClr val="202020"/>
+                </a:solidFill>
+                <a:latin typeface="Microsoft YaHei"/>
+              </a:rPr>
+              <a:t>稳定演示</a:t>
+            </a:r>
+          </a:p>
+        </p:txBody>
+      </p:sp>
       <p:cxnSp>
         <p:nvCxnSpPr>
-          <p:cNvPr id="19" name="直接连接符 18"/>
+          <p:cNvPr id="7" name="Connector 6"/>
           <p:cNvCxnSpPr/>
           <p:nvPr/>
         </p:nvCxnSpPr>
         <p:spPr>
           <a:xfrm>
-            <a:off x="137584" y="897467"/>
-            <a:ext cx="11616267" cy="0"/>
+            <a:off x="2286000" y="2331720"/>
+            <a:ext cx="1371600" cy="0"/>
           </a:xfrm>
           <a:prstGeom prst="line">
             <a:avLst/>
           </a:prstGeom>
-          <a:ln w="34925" cmpd="sng">
+          <a:ln w="17780">
             <a:solidFill>
-              <a:schemeClr val="accent6"/>
+              <a:srgbClr val="C00000"/>
             </a:solidFill>
           </a:ln>
+          <a:effectLst/>
         </p:spPr>
         <p:style>
-          <a:lnRef idx="1">
+          <a:lnRef idx="2">
             <a:schemeClr val="accent1"/>
           </a:lnRef>
           <a:fillRef idx="0">
             <a:schemeClr val="accent1"/>
           </a:fillRef>
-          <a:effectRef idx="0">
+          <a:effectRef idx="1">
             <a:schemeClr val="accent1"/>
           </a:effectRef>
           <a:fontRef idx="minor">
@@ -9528,155 +10832,86 @@
       </p:cxnSp>
       <p:sp>
         <p:nvSpPr>
-          <p:cNvPr id="3076" name="AutoShape 2" descr="http://img1.gtimg.com/rushidao/pics/hv1/229/47/1914/124470064.jpg"/>
-          <p:cNvSpPr>
-            <a:spLocks noChangeAspect="1"/>
-          </p:cNvSpPr>
-          <p:nvPr/>
-        </p:nvSpPr>
-        <p:spPr>
-          <a:xfrm>
-            <a:off x="207433" y="-192616"/>
-            <a:ext cx="406400" cy="406400"/>
-          </a:xfrm>
-          <a:prstGeom prst="rect">
-            <a:avLst/>
-          </a:prstGeom>
-          <a:noFill/>
-          <a:ln w="9525">
-            <a:noFill/>
+          <p:cNvPr id="8" name="Rounded Rectangle 7"/>
+          <p:cNvSpPr/>
+          <p:nvPr/>
+        </p:nvSpPr>
+        <p:spPr>
+          <a:xfrm>
+            <a:off x="3657600" y="1856231"/>
+            <a:ext cx="1920240" cy="960120"/>
+          </a:xfrm>
+          <a:prstGeom prst="roundRect">
+            <a:avLst/>
+          </a:prstGeom>
+          <a:solidFill>
+            <a:srgbClr val="F8F8F8"/>
+          </a:solidFill>
+          <a:ln w="17780">
+            <a:solidFill>
+              <a:srgbClr val="C00000"/>
+            </a:solidFill>
           </a:ln>
-        </p:spPr>
-        <p:txBody>
-          <a:bodyPr/>
-          <a:p>
-            <a:pPr eaLnBrk="1" hangingPunct="1"/>
-            <a:endParaRPr lang="zh-CN" altLang="en-US" sz="2400" dirty="0">
-              <a:latin typeface="Arial" panose="020B0604020202090204" pitchFamily="34" charset="0"/>
-            </a:endParaRPr>
-          </a:p>
-        </p:txBody>
-      </p:sp>
-      <p:sp>
-        <p:nvSpPr>
-          <p:cNvPr id="2" name="文本框 1"/>
-          <p:cNvSpPr txBox="1"/>
-          <p:nvPr/>
-        </p:nvSpPr>
-        <p:spPr>
-          <a:xfrm>
-            <a:off x="343535" y="1112520"/>
-            <a:ext cx="5334635" cy="521970"/>
-          </a:xfrm>
-          <a:prstGeom prst="rect">
-            <a:avLst/>
-          </a:prstGeom>
-          <a:noFill/>
-        </p:spPr>
-        <p:txBody>
-          <a:bodyPr wrap="square" rtlCol="0" anchor="t">
-            <a:spAutoFit/>
-          </a:bodyPr>
-          <a:lstStyle/>
-          <a:p>
-            <a:r>
-              <a:t>双模式设计</a:t>
-            </a:r>
-          </a:p>
-        </p:txBody>
-      </p:sp>
-      <p:sp>
-        <p:nvSpPr>
-          <p:cNvPr id="5" name="标题 1"/>
-          <p:cNvSpPr txBox="1"/>
-          <p:nvPr>
-            <p:custDataLst>
-              <p:tags r:id="rId1"/>
-            </p:custDataLst>
-          </p:nvPr>
-        </p:nvSpPr>
-        <p:spPr>
-          <a:xfrm>
-            <a:off x="463137" y="174094"/>
-            <a:ext cx="11409315" cy="736490"/>
-          </a:xfrm>
-          <a:prstGeom prst="rect">
-            <a:avLst/>
-          </a:prstGeom>
-        </p:spPr>
-        <p:txBody>
-          <a:bodyPr>
-            <a:noAutofit/>
-          </a:bodyPr>
-          <a:lstStyle>
-            <a:lvl1pPr algn="l" defTabSz="914400" rtl="0" eaLnBrk="1" latinLnBrk="0" hangingPunct="1">
-              <a:lnSpc>
-                <a:spcPct val="90000"/>
-              </a:lnSpc>
-              <a:spcBef>
-                <a:spcPct val="0"/>
-              </a:spcBef>
-              <a:buNone/>
-              <a:defRPr sz="4400" kern="1200">
-                <a:solidFill>
-                  <a:schemeClr val="tx1"/>
-                </a:solidFill>
-                <a:latin typeface="+mj-lt"/>
-                <a:ea typeface="+mj-ea"/>
-                <a:cs typeface="+mj-cs"/>
-              </a:defRPr>
-            </a:lvl1pPr>
-          </a:lstStyle>
-          <a:p>
-            <a:r>
-              <a:t>论文复现补充</a:t>
-            </a:r>
-          </a:p>
-        </p:txBody>
-      </p:sp>
-      <p:sp>
-        <p:nvSpPr>
-          <p:cNvPr id="3" name="文本框 2"/>
-          <p:cNvSpPr txBox="1"/>
-          <p:nvPr/>
-        </p:nvSpPr>
-        <p:spPr>
-          <a:xfrm>
-            <a:off x="462915" y="2960370"/>
-            <a:ext cx="5334635" cy="521970"/>
-          </a:xfrm>
-          <a:prstGeom prst="rect">
-            <a:avLst/>
-          </a:prstGeom>
-          <a:noFill/>
-        </p:spPr>
-        <p:txBody>
-          <a:bodyPr wrap="square" rtlCol="0" anchor="t">
-            <a:spAutoFit/>
-          </a:bodyPr>
-          <a:lstStyle/>
-          <a:p>
-            <a:r>
-              <a:t>运行模式</a:t>
+          <a:effectLst/>
+        </p:spPr>
+        <p:style>
+          <a:lnRef idx="1">
+            <a:schemeClr val="accent1"/>
+          </a:lnRef>
+          <a:fillRef idx="3">
+            <a:schemeClr val="accent1"/>
+          </a:fillRef>
+          <a:effectRef idx="2">
+            <a:schemeClr val="accent1"/>
+          </a:effectRef>
+          <a:fontRef idx="minor">
+            <a:schemeClr val="lt1"/>
+          </a:fontRef>
+        </p:style>
+        <p:txBody>
+          <a:bodyPr rtlCol="0" anchor="ctr" lIns="118872" rIns="118872" tIns="109728"/>
+          <a:lstStyle/>
+          <a:p>
+            <a:pPr algn="ctr"/>
+            <a:r>
+              <a:rPr sz="1700" b="1">
+                <a:solidFill>
+                  <a:srgbClr val="202020"/>
+                </a:solidFill>
+                <a:latin typeface="Microsoft YaHei"/>
+              </a:rPr>
+              <a:t>LLM 模式</a:t>
+            </a:r>
+          </a:p>
+          <a:p>
+            <a:pPr algn="ctr"/>
+            <a:r>
+              <a:rPr sz="1500">
+                <a:solidFill>
+                  <a:srgbClr val="202020"/>
+                </a:solidFill>
+                <a:latin typeface="Microsoft YaHei"/>
+              </a:rPr>
+              <a:t>模型生成</a:t>
             </a:r>
           </a:p>
         </p:txBody>
       </p:sp>
       <p:cxnSp>
         <p:nvCxnSpPr>
-          <p:cNvPr id="14" name="Connector 4"/>
+          <p:cNvPr id="9" name="Connector 8"/>
           <p:cNvCxnSpPr/>
           <p:nvPr/>
         </p:nvCxnSpPr>
         <p:spPr>
           <a:xfrm>
-            <a:off x="1965960" y="2148840"/>
-            <a:ext cx="1874520" cy="0"/>
+            <a:off x="5577840" y="2331720"/>
+            <a:ext cx="1600200" cy="0"/>
           </a:xfrm>
           <a:prstGeom prst="line">
             <a:avLst/>
           </a:prstGeom>
-          <a:ln w="21590">
+          <a:ln w="17780">
             <a:solidFill>
               <a:srgbClr val="C00000"/>
             </a:solidFill>
@@ -9698,21 +10933,88 @@
           </a:fontRef>
         </p:style>
       </p:cxnSp>
+      <p:sp>
+        <p:nvSpPr>
+          <p:cNvPr id="10" name="Rounded Rectangle 9"/>
+          <p:cNvSpPr/>
+          <p:nvPr/>
+        </p:nvSpPr>
+        <p:spPr>
+          <a:xfrm>
+            <a:off x="7178040" y="1856231"/>
+            <a:ext cx="1965960" cy="960120"/>
+          </a:xfrm>
+          <a:prstGeom prst="roundRect">
+            <a:avLst/>
+          </a:prstGeom>
+          <a:solidFill>
+            <a:srgbClr val="F8F8F8"/>
+          </a:solidFill>
+          <a:ln w="17780">
+            <a:solidFill>
+              <a:srgbClr val="C00000"/>
+            </a:solidFill>
+          </a:ln>
+          <a:effectLst/>
+        </p:spPr>
+        <p:style>
+          <a:lnRef idx="1">
+            <a:schemeClr val="accent1"/>
+          </a:lnRef>
+          <a:fillRef idx="3">
+            <a:schemeClr val="accent1"/>
+          </a:fillRef>
+          <a:effectRef idx="2">
+            <a:schemeClr val="accent1"/>
+          </a:effectRef>
+          <a:fontRef idx="minor">
+            <a:schemeClr val="lt1"/>
+          </a:fontRef>
+        </p:style>
+        <p:txBody>
+          <a:bodyPr rtlCol="0" anchor="ctr" lIns="118872" rIns="118872" tIns="109728"/>
+          <a:lstStyle/>
+          <a:p>
+            <a:pPr algn="ctr"/>
+            <a:r>
+              <a:rPr sz="1700" b="1">
+                <a:solidFill>
+                  <a:srgbClr val="202020"/>
+                </a:solidFill>
+                <a:latin typeface="Microsoft YaHei"/>
+              </a:rPr>
+              <a:t>失败回退</a:t>
+            </a:r>
+          </a:p>
+          <a:p>
+            <a:pPr algn="ctr"/>
+            <a:r>
+              <a:rPr sz="1500">
+                <a:solidFill>
+                  <a:srgbClr val="202020"/>
+                </a:solidFill>
+                <a:latin typeface="Microsoft YaHei"/>
+              </a:rPr>
+              <a:t>接口异常</a:t>
+            </a:r>
+          </a:p>
+        </p:txBody>
+      </p:sp>
       <p:cxnSp>
         <p:nvCxnSpPr>
-          <p:cNvPr id="15" name="Connector 5"/>
+          <p:cNvPr id="11" name="Connector 10"/>
           <p:cNvCxnSpPr/>
           <p:nvPr/>
         </p:nvCxnSpPr>
         <p:spPr>
           <a:xfrm>
-            <a:off x="5532120" y="2148840"/>
-            <a:ext cx="1874520" cy="0"/>
+            <a:off x="9144000" y="2331720"/>
+            <a:ext cx="914400" cy="0"/>
           </a:xfrm>
           <a:prstGeom prst="line">
             <a:avLst/>
           </a:prstGeom>
-          <a:ln w="21590">
+          <a:ln w="17780">
             <a:solidFill>
               <a:srgbClr val="C00000"/>
             </a:solidFill>
@@ -9734,21 +11036,24 @@
           </a:fontRef>
         </p:style>
       </p:cxnSp>
-      <p:cxnSp>
-        <p:nvCxnSpPr>
-          <p:cNvPr id="16" name="Connector 6"/>
-          <p:cNvCxnSpPr/>
-          <p:nvPr/>
-        </p:nvCxnSpPr>
-        <p:spPr>
-          <a:xfrm>
-            <a:off x="9098280" y="2148840"/>
-            <a:ext cx="1234440" cy="0"/>
-          </a:xfrm>
-          <a:prstGeom prst="line">
-            <a:avLst/>
-          </a:prstGeom>
-          <a:ln w="21590">
+      <p:sp>
+        <p:nvSpPr>
+          <p:cNvPr id="12" name="Rounded Rectangle 11"/>
+          <p:cNvSpPr/>
+          <p:nvPr/>
+        </p:nvSpPr>
+        <p:spPr>
+          <a:xfrm>
+            <a:off x="10058400" y="1856231"/>
+            <a:ext cx="1664208" cy="960120"/>
+          </a:xfrm>
+          <a:prstGeom prst="roundRect">
+            <a:avLst/>
+          </a:prstGeom>
+          <a:solidFill>
+            <a:srgbClr val="F8F8F8"/>
+          </a:solidFill>
+          <a:ln w="17780">
             <a:solidFill>
               <a:srgbClr val="C00000"/>
             </a:solidFill>
@@ -9756,45 +11061,6 @@
           <a:effectLst/>
         </p:spPr>
         <p:style>
-          <a:lnRef idx="2">
-            <a:schemeClr val="accent1"/>
-          </a:lnRef>
-          <a:fillRef idx="0">
-            <a:schemeClr val="accent1"/>
-          </a:fillRef>
-          <a:effectRef idx="1">
-            <a:schemeClr val="accent1"/>
-          </a:effectRef>
-          <a:fontRef idx="minor">
-            <a:schemeClr val="tx1"/>
-          </a:fontRef>
-        </p:style>
-      </p:cxnSp>
-      <p:sp>
-        <p:nvSpPr>
-          <p:cNvPr id="17" name="Rounded Rectangle 7"/>
-          <p:cNvSpPr/>
-          <p:nvPr/>
-        </p:nvSpPr>
-        <p:spPr>
-          <a:xfrm>
-            <a:off x="685800" y="1664208"/>
-            <a:ext cx="1554480" cy="969264"/>
-          </a:xfrm>
-          <a:prstGeom prst="roundRect">
-            <a:avLst/>
-          </a:prstGeom>
-          <a:solidFill>
-            <a:srgbClr val="F5F5F5"/>
-          </a:solidFill>
-          <a:ln w="15240">
-            <a:solidFill>
-              <a:srgbClr val="C00000"/>
-            </a:solidFill>
-          </a:ln>
-          <a:effectLst/>
-        </p:spPr>
-        <p:style>
           <a:lnRef idx="1">
             <a:schemeClr val="accent1"/>
           </a:lnRef>
@@ -9809,40 +11075,54 @@
           </a:fontRef>
         </p:style>
         <p:txBody>
-          <a:bodyPr wrap="square" lIns="73152" rIns="73152" rtlCol="0" anchor="ctr"/>
-          <a:lstStyle/>
-          <a:p>
-            <a:r>
-              <a:t>deterministic</a:t>
-            </a:r>
-          </a:p>
-          <a:p>
-            <a:r>
-              <a:t>稳定演示</a:t>
-            </a:r>
-          </a:p>
-        </p:txBody>
-      </p:sp>
-      <p:sp>
-        <p:nvSpPr>
-          <p:cNvPr id="18" name="Rounded Rectangle 8"/>
+          <a:bodyPr rtlCol="0" anchor="ctr" lIns="118872" rIns="118872" tIns="109728"/>
+          <a:lstStyle/>
+          <a:p>
+            <a:pPr algn="ctr"/>
+            <a:r>
+              <a:rPr sz="1700" b="1">
+                <a:solidFill>
+                  <a:srgbClr val="202020"/>
+                </a:solidFill>
+                <a:latin typeface="Microsoft YaHei"/>
+              </a:rPr>
+              <a:t>证据记录</a:t>
+            </a:r>
+          </a:p>
+          <a:p>
+            <a:pPr algn="ctr"/>
+            <a:r>
+              <a:rPr sz="1500">
+                <a:solidFill>
+                  <a:srgbClr val="202020"/>
+                </a:solidFill>
+                <a:latin typeface="Microsoft YaHei"/>
+              </a:rPr>
+              <a:t>状态可解释</a:t>
+            </a:r>
+          </a:p>
+        </p:txBody>
+      </p:sp>
+      <p:sp>
+        <p:nvSpPr>
+          <p:cNvPr id="13" name="Rectangle 12"/>
           <p:cNvSpPr/>
           <p:nvPr/>
         </p:nvSpPr>
         <p:spPr>
           <a:xfrm>
-            <a:off x="3657600" y="1664208"/>
-            <a:ext cx="1920240" cy="969264"/>
-          </a:xfrm>
-          <a:prstGeom prst="roundRect">
+            <a:off x="457200" y="3383280"/>
+            <a:ext cx="146304" cy="146304"/>
+          </a:xfrm>
+          <a:prstGeom prst="rect">
             <a:avLst/>
           </a:prstGeom>
           <a:solidFill>
-            <a:srgbClr val="F5F5F5"/>
+            <a:srgbClr val="1C4491"/>
           </a:solidFill>
-          <a:ln w="15240">
+          <a:ln>
             <a:solidFill>
-              <a:srgbClr val="C00000"/>
+              <a:srgbClr val="1C4491"/>
             </a:solidFill>
           </a:ln>
           <a:effectLst/>
@@ -9862,40 +11142,173 @@
           </a:fontRef>
         </p:style>
         <p:txBody>
-          <a:bodyPr wrap="square" lIns="73152" rIns="73152" rtlCol="0" anchor="ctr"/>
-          <a:lstStyle/>
-          <a:p>
-            <a:r>
-              <a:t>llm</a:t>
-            </a:r>
-          </a:p>
-          <a:p>
-            <a:r>
-              <a:t>模型生成</a:t>
-            </a:r>
-          </a:p>
-        </p:txBody>
-      </p:sp>
-      <p:sp>
-        <p:nvSpPr>
-          <p:cNvPr id="20" name="Rounded Rectangle 9"/>
+          <a:bodyPr rtlCol="0" anchor="ctr"/>
+          <a:lstStyle/>
+          <a:p>
+            <a:pPr algn="ctr"/>
+          </a:p>
+        </p:txBody>
+      </p:sp>
+      <p:sp>
+        <p:nvSpPr>
+          <p:cNvPr id="14" name="TextBox 13"/>
+          <p:cNvSpPr txBox="1"/>
+          <p:nvPr/>
+        </p:nvSpPr>
+        <p:spPr>
+          <a:xfrm>
+            <a:off x="749808" y="3291840"/>
+            <a:ext cx="5212080" cy="438912"/>
+          </a:xfrm>
+          <a:prstGeom prst="rect">
+            <a:avLst/>
+          </a:prstGeom>
+          <a:noFill/>
+          <a:effectLst/>
+        </p:spPr>
+        <p:txBody>
+          <a:bodyPr wrap="none" lIns="0" rIns="0" tIns="0" bIns="0">
+            <a:spAutoFit/>
+          </a:bodyPr>
+          <a:lstStyle/>
+          <a:p>
+            <a:r>
+              <a:rPr sz="2400" b="1">
+                <a:solidFill>
+                  <a:srgbClr val="C00000"/>
+                </a:solidFill>
+                <a:latin typeface="Microsoft YaHei"/>
+              </a:rPr>
+              <a:t>说明</a:t>
+            </a:r>
+          </a:p>
+        </p:txBody>
+      </p:sp>
+      <p:sp>
+        <p:nvSpPr>
+          <p:cNvPr id="15" name="TextBox 14"/>
+          <p:cNvSpPr txBox="1"/>
+          <p:nvPr/>
+        </p:nvSpPr>
+        <p:spPr>
+          <a:xfrm>
+            <a:off x="749808" y="3822191"/>
+            <a:ext cx="5394960" cy="274320"/>
+          </a:xfrm>
+          <a:prstGeom prst="rect">
+            <a:avLst/>
+          </a:prstGeom>
+          <a:noFill/>
+          <a:effectLst/>
+        </p:spPr>
+        <p:txBody>
+          <a:bodyPr wrap="none" lIns="0" rIns="0" tIns="0" bIns="0">
+            <a:spAutoFit/>
+          </a:bodyPr>
+          <a:lstStyle/>
+          <a:p>
+            <a:r>
+              <a:rPr sz="1500" b="0">
+                <a:solidFill>
+                  <a:srgbClr val="202020"/>
+                </a:solidFill>
+                <a:latin typeface="Microsoft YaHei"/>
+              </a:rPr>
+              <a:t>规则模式：适合录屏和答辩，传播链稳定可复现。</a:t>
+            </a:r>
+          </a:p>
+        </p:txBody>
+      </p:sp>
+      <p:sp>
+        <p:nvSpPr>
+          <p:cNvPr id="16" name="TextBox 15"/>
+          <p:cNvSpPr txBox="1"/>
+          <p:nvPr/>
+        </p:nvSpPr>
+        <p:spPr>
+          <a:xfrm>
+            <a:off x="749808" y="4142231"/>
+            <a:ext cx="5394960" cy="274320"/>
+          </a:xfrm>
+          <a:prstGeom prst="rect">
+            <a:avLst/>
+          </a:prstGeom>
+          <a:noFill/>
+          <a:effectLst/>
+        </p:spPr>
+        <p:txBody>
+          <a:bodyPr wrap="none" lIns="0" rIns="0" tIns="0" bIns="0">
+            <a:spAutoFit/>
+          </a:bodyPr>
+          <a:lstStyle/>
+          <a:p>
+            <a:r>
+              <a:rPr sz="1500" b="0">
+                <a:solidFill>
+                  <a:srgbClr val="202020"/>
+                </a:solidFill>
+                <a:latin typeface="Microsoft YaHei"/>
+              </a:rPr>
+              <a:t>LLM 模式：让模型参与计划、行动、对话和反思生成。</a:t>
+            </a:r>
+          </a:p>
+        </p:txBody>
+      </p:sp>
+      <p:sp>
+        <p:nvSpPr>
+          <p:cNvPr id="17" name="TextBox 16"/>
+          <p:cNvSpPr txBox="1"/>
+          <p:nvPr/>
+        </p:nvSpPr>
+        <p:spPr>
+          <a:xfrm>
+            <a:off x="749808" y="4462272"/>
+            <a:ext cx="5394960" cy="274320"/>
+          </a:xfrm>
+          <a:prstGeom prst="rect">
+            <a:avLst/>
+          </a:prstGeom>
+          <a:noFill/>
+          <a:effectLst/>
+        </p:spPr>
+        <p:txBody>
+          <a:bodyPr wrap="none" lIns="0" rIns="0" tIns="0" bIns="0">
+            <a:spAutoFit/>
+          </a:bodyPr>
+          <a:lstStyle/>
+          <a:p>
+            <a:r>
+              <a:rPr sz="1500" b="0">
+                <a:solidFill>
+                  <a:srgbClr val="202020"/>
+                </a:solidFill>
+                <a:latin typeface="Microsoft YaHei"/>
+              </a:rPr>
+              <a:t>接口失败时自动回退，避免现场 demo 中断。</a:t>
+            </a:r>
+          </a:p>
+        </p:txBody>
+      </p:sp>
+      <p:sp>
+        <p:nvSpPr>
+          <p:cNvPr id="18" name="Rounded Rectangle 17"/>
           <p:cNvSpPr/>
           <p:nvPr/>
         </p:nvSpPr>
         <p:spPr>
           <a:xfrm>
-            <a:off x="7205472" y="1664208"/>
-            <a:ext cx="1965960" cy="969264"/>
+            <a:off x="6720840" y="3822191"/>
+            <a:ext cx="4892040" cy="1572768"/>
           </a:xfrm>
           <a:prstGeom prst="roundRect">
             <a:avLst/>
           </a:prstGeom>
           <a:solidFill>
-            <a:srgbClr val="F5F5F5"/>
+            <a:srgbClr val="202020"/>
           </a:solidFill>
-          <a:ln w="15240">
+          <a:ln>
             <a:solidFill>
-              <a:srgbClr val="C00000"/>
+              <a:srgbClr val="202020"/>
             </a:solidFill>
           </a:ln>
           <a:effectLst/>
@@ -9915,122 +11328,51 @@
           </a:fontRef>
         </p:style>
         <p:txBody>
-          <a:bodyPr wrap="square" lIns="73152" rIns="73152" rtlCol="0" anchor="ctr"/>
-          <a:lstStyle/>
-          <a:p>
-            <a:r>
-              <a:t>fallback</a:t>
-            </a:r>
-          </a:p>
-          <a:p>
-            <a:r>
-              <a:t>失败回退</a:t>
-            </a:r>
-          </a:p>
-        </p:txBody>
-      </p:sp>
-      <p:sp>
-        <p:nvSpPr>
-          <p:cNvPr id="21" name="Rounded Rectangle 10"/>
-          <p:cNvSpPr/>
-          <p:nvPr/>
-        </p:nvSpPr>
-        <p:spPr>
-          <a:xfrm>
-            <a:off x="10131552" y="1664208"/>
-            <a:ext cx="1600200" cy="969264"/>
-          </a:xfrm>
-          <a:prstGeom prst="roundRect">
-            <a:avLst/>
-          </a:prstGeom>
-          <a:solidFill>
-            <a:srgbClr val="F5F5F5"/>
-          </a:solidFill>
-          <a:ln w="15240">
-            <a:solidFill>
-              <a:srgbClr val="C00000"/>
-            </a:solidFill>
-          </a:ln>
-          <a:effectLst/>
-        </p:spPr>
-        <p:style>
-          <a:lnRef idx="1">
-            <a:schemeClr val="accent1"/>
-          </a:lnRef>
-          <a:fillRef idx="3">
-            <a:schemeClr val="accent1"/>
-          </a:fillRef>
-          <a:effectRef idx="2">
-            <a:schemeClr val="accent1"/>
-          </a:effectRef>
-          <a:fontRef idx="minor">
-            <a:schemeClr val="lt1"/>
-          </a:fontRef>
-        </p:style>
-        <p:txBody>
-          <a:bodyPr wrap="square" lIns="73152" rIns="73152" rtlCol="0" anchor="ctr"/>
-          <a:lstStyle/>
-          <a:p>
-            <a:r>
-              <a:t>evidence</a:t>
-            </a:r>
-          </a:p>
-          <a:p>
-            <a:r>
-              <a:t>状态可解释</a:t>
-            </a:r>
-          </a:p>
-        </p:txBody>
-      </p:sp>
-      <p:sp>
-        <p:nvSpPr>
-          <p:cNvPr id="22" name="Rounded Rectangle 13"/>
-          <p:cNvSpPr/>
-          <p:nvPr/>
-        </p:nvSpPr>
-        <p:spPr>
-          <a:xfrm>
-            <a:off x="7062470" y="3753612"/>
-            <a:ext cx="4343400" cy="1600200"/>
-          </a:xfrm>
-          <a:prstGeom prst="roundRect">
-            <a:avLst/>
-          </a:prstGeom>
-          <a:solidFill>
-            <a:srgbClr val="232323"/>
-          </a:solidFill>
-          <a:ln>
-            <a:solidFill>
-              <a:srgbClr val="232323"/>
-            </a:solidFill>
-          </a:ln>
-          <a:effectLst/>
-        </p:spPr>
-        <p:style>
-          <a:lnRef idx="1">
-            <a:schemeClr val="accent1"/>
-          </a:lnRef>
-          <a:fillRef idx="3">
-            <a:schemeClr val="accent1"/>
-          </a:fillRef>
-          <a:effectRef idx="2">
-            <a:schemeClr val="accent1"/>
-          </a:effectRef>
-          <a:fontRef idx="minor">
-            <a:schemeClr val="lt1"/>
-          </a:fontRef>
-        </p:style>
-        <p:txBody>
-          <a:bodyPr wrap="none" lIns="109728" tIns="91440" rIns="73152" bIns="73152" rtlCol="0" anchor="ctr"/>
-          <a:lstStyle/>
-          <a:p>
-            <a:r>
-              <a:t>deterministic 模式适合录屏和答辩；llm 模式让模型参与计划、行动、对话和 reflection 生成。</a:t>
-            </a:r>
-          </a:p>
-          <a:p>
-            <a:r>
-              <a:t>接口失败时自动规则回退，右侧面板显示模式、LLM 状态、记忆流数量和反思触发依据。</a:t>
+          <a:bodyPr rtlCol="0" anchor="ctr" lIns="201168" rIns="201168" tIns="146304"/>
+          <a:lstStyle/>
+          <a:p>
+            <a:pPr algn="ctr"/>
+            <a:r>
+              <a:rPr sz="1500" b="1">
+                <a:solidFill>
+                  <a:srgbClr val="FFFFFF"/>
+                </a:solidFill>
+                <a:latin typeface="Microsoft YaHei"/>
+              </a:rPr>
+              <a:t>为什么这样设计</a:t>
+            </a:r>
+          </a:p>
+          <a:p>
+            <a:r>
+              <a:rPr sz="1200">
+                <a:solidFill>
+                  <a:srgbClr val="FFFFFF"/>
+                </a:solidFill>
+                <a:latin typeface="Microsoft YaHei"/>
+              </a:rPr>
+              <a:t>规则模式：适合录屏和答辩，传播链稳定可复现。</a:t>
+            </a:r>
+          </a:p>
+          <a:p>
+            <a:r>
+              <a:rPr sz="1200">
+                <a:solidFill>
+                  <a:srgbClr val="FFFFFF"/>
+                </a:solidFill>
+                <a:latin typeface="Microsoft YaHei"/>
+              </a:rPr>
+              <a:t>LLM 模式：让模型参与计划、行动、对话和反思生成。</a:t>
+            </a:r>
+          </a:p>
+          <a:p>
+            <a:r>
+              <a:rPr sz="1200">
+                <a:solidFill>
+                  <a:srgbClr val="FFFFFF"/>
+                </a:solidFill>
+                <a:latin typeface="Microsoft YaHei"/>
+              </a:rPr>
+              <a:t>接口失败时自动回退，避免现场 demo 中断。</a:t>
             </a:r>
           </a:p>
         </p:txBody>
